--- a/slides/m100_agent_deck_1024.pptx
+++ b/slides/m100_agent_deck_1024.pptx
@@ -1397,7 +1397,7 @@
                 <a:ea typeface="Microsoft YaHei"/>
                 <a:cs typeface="Microsoft YaHei"/>
               </a:rPr>
-              <a:t>下面一框是算子层：XCN_ATEN_OPS。这一层补齐算子缺口、生成与调优实现、再用真机验证收益，第 6 页展开。</a:t>
+              <a:t>下面一框是算子层：XCN_ATEN_OPS。这一层补齐算子缺口、生成与调优实现、再用真机验证收益，第 6、7 页展开。</a:t>
             </a:r>
           </a:p>
           <a:p>
@@ -14098,7 +14098,7 @@
                 <a:ea typeface="Microsoft YaHei"/>
                 <a:cs typeface="Microsoft YaHei"/>
               </a:rPr>
-              <a:t>　→　第 6 页展开</a:t>
+              <a:t>　→　第 6、7 页展开</a:t>
             </a:r>
           </a:p>
         </p:txBody>

--- a/slides/m100_agent_deck_1024.pptx
+++ b/slides/m100_agent_deck_1024.pptx
@@ -2658,7 +2658,7 @@
                 <a:ea typeface="Microsoft YaHei"/>
                 <a:cs typeface="Microsoft YaHei"/>
               </a:rPr>
-              <a:t>右边是五轮改动，表上都有，我只点两处。第 3 轮想用 shared 广播系数，加了同步之后反而更慢，15.06 微秒，当场丢弃；第 4 轮想把系数挪到 host 侧折好，但每次要 H2D 上传 2KB，光传输就 17.6 微秒，比 kernel 本身还贵，也丢弃——注意这一轮丢的理由是整体变慢，不是 kernel 变慢。</a:t>
+              <a:t>右边是五轮改动，表上都有，我只点两处。第 3 轮想用 shared 广播系数，加了同步之后反而更慢，15.06 微秒、0.468，当场丢弃；第 4 轮想把系数挪到 host 侧折好，但每次调用都要把系数 H2D 上传一遍，连上传一起算 17.60 微秒、0.401，是八轮里最差的一个，也丢弃。</a:t>
             </a:r>
           </a:p>
           <a:p>
@@ -2784,7 +2784,7 @@
                 <a:ea typeface="Microsoft YaHei"/>
                 <a:cs typeface="Microsoft YaHei"/>
               </a:rPr>
-              <a:t>第 4 轮的 17.60 微秒是 H2D 传输本身，不是 kernel 耗时，所以那一行没有 achieved；它被丢弃的理由是整体变慢，而不是 kernel 变慢。</a:t>
+              <a:t>第 4 轮的 0.401 是按 17.60 微秒的整体耗时算的，里面含每次调用的 H2D 上传。kernel 本身没有变慢，是这次上传把整体拖垮了，所以丢弃的理由是整体变慢。</a:t>
             </a:r>
           </a:p>
           <a:p>
@@ -23598,7 +23598,7 @@
         </p:nvCxnSpPr>
         <p:spPr>
           <a:xfrm>
-            <a:off x="1188720" y="4243324"/>
+            <a:off x="1188720" y="4204498"/>
             <a:ext cx="5349240" cy="0"/>
           </a:xfrm>
           <a:prstGeom prst="line">
@@ -23619,7 +23619,7 @@
         </p:nvSpPr>
         <p:spPr>
           <a:xfrm>
-            <a:off x="621792" y="4142739"/>
+            <a:off x="621792" y="4103914"/>
             <a:ext cx="457200" cy="201168"/>
           </a:xfrm>
           <a:prstGeom prst="rect">
@@ -23653,7 +23653,7 @@
                 <a:ea typeface="Microsoft YaHei"/>
                 <a:cs typeface="Microsoft YaHei"/>
               </a:rPr>
-              <a:t>0.45</a:t>
+              <a:t>0.40</a:t>
             </a:r>
           </a:p>
         </p:txBody>
@@ -23721,7 +23721,7 @@
                 <a:ea typeface="Microsoft YaHei"/>
                 <a:cs typeface="Microsoft YaHei"/>
               </a:rPr>
-              <a:t>0.50</a:t>
+              <a:t>0.45</a:t>
             </a:r>
           </a:p>
         </p:txBody>
@@ -23734,7 +23734,7 @@
         </p:nvCxnSpPr>
         <p:spPr>
           <a:xfrm>
-            <a:off x="1188720" y="3699764"/>
+            <a:off x="1188720" y="3738589"/>
             <a:ext cx="5349240" cy="0"/>
           </a:xfrm>
           <a:prstGeom prst="line">
@@ -23755,7 +23755,7 @@
         </p:nvSpPr>
         <p:spPr>
           <a:xfrm>
-            <a:off x="621792" y="3599180"/>
+            <a:off x="621792" y="3638005"/>
             <a:ext cx="457200" cy="201168"/>
           </a:xfrm>
           <a:prstGeom prst="rect">
@@ -23789,7 +23789,7 @@
                 <a:ea typeface="Microsoft YaHei"/>
                 <a:cs typeface="Microsoft YaHei"/>
               </a:rPr>
-              <a:t>0.55</a:t>
+              <a:t>0.50</a:t>
             </a:r>
           </a:p>
         </p:txBody>
@@ -23802,7 +23802,7 @@
         </p:nvCxnSpPr>
         <p:spPr>
           <a:xfrm>
-            <a:off x="1188720" y="3427984"/>
+            <a:off x="1188720" y="3505635"/>
             <a:ext cx="5349240" cy="0"/>
           </a:xfrm>
           <a:prstGeom prst="line">
@@ -23823,7 +23823,7 @@
         </p:nvSpPr>
         <p:spPr>
           <a:xfrm>
-            <a:off x="621792" y="3327400"/>
+            <a:off x="621792" y="3405051"/>
             <a:ext cx="457200" cy="201168"/>
           </a:xfrm>
           <a:prstGeom prst="rect">
@@ -23857,7 +23857,7 @@
                 <a:ea typeface="Microsoft YaHei"/>
                 <a:cs typeface="Microsoft YaHei"/>
               </a:rPr>
-              <a:t>0.60</a:t>
+              <a:t>0.55</a:t>
             </a:r>
           </a:p>
         </p:txBody>
@@ -23870,7 +23870,7 @@
         </p:nvCxnSpPr>
         <p:spPr>
           <a:xfrm>
-            <a:off x="1188720" y="3156204"/>
+            <a:off x="1188720" y="3272681"/>
             <a:ext cx="5349240" cy="0"/>
           </a:xfrm>
           <a:prstGeom prst="line">
@@ -23891,7 +23891,7 @@
         </p:nvSpPr>
         <p:spPr>
           <a:xfrm>
-            <a:off x="621792" y="3055620"/>
+            <a:off x="621792" y="3172097"/>
             <a:ext cx="457200" cy="201168"/>
           </a:xfrm>
           <a:prstGeom prst="rect">
@@ -23925,67 +23925,20 @@
                 <a:ea typeface="Microsoft YaHei"/>
                 <a:cs typeface="Microsoft YaHei"/>
               </a:rPr>
-              <a:t>0.65</a:t>
-            </a:r>
-          </a:p>
-        </p:txBody>
-      </p:sp>
-      <p:sp>
-        <p:nvSpPr>
-          <p:cNvPr id="25" name="TextBox 24"/>
-          <p:cNvSpPr txBox="1"/>
-          <p:nvPr/>
-        </p:nvSpPr>
-        <p:spPr>
-          <a:xfrm>
-            <a:off x="621792" y="2783840"/>
-            <a:ext cx="457200" cy="201168"/>
-          </a:xfrm>
-          <a:prstGeom prst="rect">
-            <a:avLst/>
-          </a:prstGeom>
-          <a:noFill/>
-        </p:spPr>
-        <p:txBody>
-          <a:bodyPr wrap="square" anchor="ctr" lIns="0" tIns="0" rIns="0" bIns="0">
-            <a:noAutofit/>
-          </a:bodyPr>
-          <a:lstStyle/>
-          <a:p>
-            <a:pPr algn="r" latinLnBrk="0">
-              <a:lnSpc>
-                <a:spcPct val="100000"/>
-              </a:lnSpc>
-              <a:spcBef>
-                <a:spcPts val="0"/>
-              </a:spcBef>
-              <a:spcAft>
-                <a:spcPts val="0"/>
-              </a:spcAft>
-            </a:pPr>
-            <a:r>
-              <a:rPr sz="900" b="0">
-                <a:solidFill>
-                  <a:srgbClr val="7FA4BA"/>
-                </a:solidFill>
-                <a:latin typeface="Microsoft YaHei"/>
-                <a:ea typeface="Microsoft YaHei"/>
-                <a:cs typeface="Microsoft YaHei"/>
-              </a:rPr>
-              <a:t>0.70</a:t>
+              <a:t>0.60</a:t>
             </a:r>
           </a:p>
         </p:txBody>
       </p:sp>
       <p:cxnSp>
         <p:nvCxnSpPr>
-          <p:cNvPr id="26" name="Connector 25"/>
+          <p:cNvPr id="25" name="Connector 24"/>
           <p:cNvCxnSpPr/>
           <p:nvPr/>
         </p:nvCxnSpPr>
         <p:spPr>
           <a:xfrm>
-            <a:off x="1188720" y="2612644"/>
+            <a:off x="1188720" y="3039726"/>
             <a:ext cx="5349240" cy="0"/>
           </a:xfrm>
           <a:prstGeom prst="line">
@@ -24000,13 +23953,60 @@
       </p:cxnSp>
       <p:sp>
         <p:nvSpPr>
+          <p:cNvPr id="26" name="TextBox 25"/>
+          <p:cNvSpPr txBox="1"/>
+          <p:nvPr/>
+        </p:nvSpPr>
+        <p:spPr>
+          <a:xfrm>
+            <a:off x="621792" y="2939142"/>
+            <a:ext cx="457200" cy="201168"/>
+          </a:xfrm>
+          <a:prstGeom prst="rect">
+            <a:avLst/>
+          </a:prstGeom>
+          <a:noFill/>
+        </p:spPr>
+        <p:txBody>
+          <a:bodyPr wrap="square" anchor="ctr" lIns="0" tIns="0" rIns="0" bIns="0">
+            <a:noAutofit/>
+          </a:bodyPr>
+          <a:lstStyle/>
+          <a:p>
+            <a:pPr algn="r" latinLnBrk="0">
+              <a:lnSpc>
+                <a:spcPct val="100000"/>
+              </a:lnSpc>
+              <a:spcBef>
+                <a:spcPts val="0"/>
+              </a:spcBef>
+              <a:spcAft>
+                <a:spcPts val="0"/>
+              </a:spcAft>
+            </a:pPr>
+            <a:r>
+              <a:rPr sz="900" b="0">
+                <a:solidFill>
+                  <a:srgbClr val="7FA4BA"/>
+                </a:solidFill>
+                <a:latin typeface="Microsoft YaHei"/>
+                <a:ea typeface="Microsoft YaHei"/>
+                <a:cs typeface="Microsoft YaHei"/>
+              </a:rPr>
+              <a:t>0.65</a:t>
+            </a:r>
+          </a:p>
+        </p:txBody>
+      </p:sp>
+      <p:sp>
+        <p:nvSpPr>
           <p:cNvPr id="27" name="TextBox 26"/>
           <p:cNvSpPr txBox="1"/>
           <p:nvPr/>
         </p:nvSpPr>
         <p:spPr>
           <a:xfrm>
-            <a:off x="621792" y="2512060"/>
+            <a:off x="621792" y="2706188"/>
             <a:ext cx="457200" cy="201168"/>
           </a:xfrm>
           <a:prstGeom prst="rect">
@@ -24040,7 +24040,7 @@
                 <a:ea typeface="Microsoft YaHei"/>
                 <a:cs typeface="Microsoft YaHei"/>
               </a:rPr>
-              <a:t>0.75</a:t>
+              <a:t>0.70</a:t>
             </a:r>
           </a:p>
         </p:txBody>
@@ -24053,7 +24053,75 @@
         </p:nvCxnSpPr>
         <p:spPr>
           <a:xfrm>
-            <a:off x="1188720" y="2884424"/>
+            <a:off x="1188720" y="2573818"/>
+            <a:ext cx="5349240" cy="0"/>
+          </a:xfrm>
+          <a:prstGeom prst="line">
+            <a:avLst/>
+          </a:prstGeom>
+          <a:ln w="9525">
+            <a:solidFill>
+              <a:srgbClr val="CFE3F0"/>
+            </a:solidFill>
+          </a:ln>
+        </p:spPr>
+      </p:cxnSp>
+      <p:sp>
+        <p:nvSpPr>
+          <p:cNvPr id="29" name="TextBox 28"/>
+          <p:cNvSpPr txBox="1"/>
+          <p:nvPr/>
+        </p:nvSpPr>
+        <p:spPr>
+          <a:xfrm>
+            <a:off x="621792" y="2473234"/>
+            <a:ext cx="457200" cy="201168"/>
+          </a:xfrm>
+          <a:prstGeom prst="rect">
+            <a:avLst/>
+          </a:prstGeom>
+          <a:noFill/>
+        </p:spPr>
+        <p:txBody>
+          <a:bodyPr wrap="square" anchor="ctr" lIns="0" tIns="0" rIns="0" bIns="0">
+            <a:noAutofit/>
+          </a:bodyPr>
+          <a:lstStyle/>
+          <a:p>
+            <a:pPr algn="r" latinLnBrk="0">
+              <a:lnSpc>
+                <a:spcPct val="100000"/>
+              </a:lnSpc>
+              <a:spcBef>
+                <a:spcPts val="0"/>
+              </a:spcBef>
+              <a:spcAft>
+                <a:spcPts val="0"/>
+              </a:spcAft>
+            </a:pPr>
+            <a:r>
+              <a:rPr sz="900" b="0">
+                <a:solidFill>
+                  <a:srgbClr val="7FA4BA"/>
+                </a:solidFill>
+                <a:latin typeface="Microsoft YaHei"/>
+                <a:ea typeface="Microsoft YaHei"/>
+                <a:cs typeface="Microsoft YaHei"/>
+              </a:rPr>
+              <a:t>0.75</a:t>
+            </a:r>
+          </a:p>
+        </p:txBody>
+      </p:sp>
+      <p:cxnSp>
+        <p:nvCxnSpPr>
+          <p:cNvPr id="30" name="Connector 29"/>
+          <p:cNvCxnSpPr/>
+          <p:nvPr/>
+        </p:nvCxnSpPr>
+        <p:spPr>
+          <a:xfrm>
+            <a:off x="1188720" y="2806772"/>
             <a:ext cx="5349240" cy="0"/>
           </a:xfrm>
           <a:prstGeom prst="line">
@@ -24069,13 +24137,13 @@
       </p:cxnSp>
       <p:cxnSp>
         <p:nvCxnSpPr>
-          <p:cNvPr id="29" name="Connector 28"/>
+          <p:cNvPr id="31" name="Connector 30"/>
           <p:cNvCxnSpPr/>
           <p:nvPr/>
         </p:nvCxnSpPr>
         <p:spPr>
           <a:xfrm>
-            <a:off x="1188720" y="2792018"/>
+            <a:off x="1188720" y="2727568"/>
             <a:ext cx="5349240" cy="0"/>
           </a:xfrm>
           <a:prstGeom prst="line">
@@ -24091,7 +24159,7 @@
       </p:cxnSp>
       <p:cxnSp>
         <p:nvCxnSpPr>
-          <p:cNvPr id="30" name="Connector 29"/>
+          <p:cNvPr id="32" name="Connector 31"/>
           <p:cNvCxnSpPr/>
           <p:nvPr/>
         </p:nvCxnSpPr>
@@ -24112,13 +24180,13 @@
       </p:cxnSp>
       <p:cxnSp>
         <p:nvCxnSpPr>
-          <p:cNvPr id="31" name="Connector 30"/>
+          <p:cNvPr id="33" name="Connector 32"/>
           <p:cNvCxnSpPr/>
           <p:nvPr/>
         </p:nvCxnSpPr>
         <p:spPr>
           <a:xfrm>
-            <a:off x="1691640" y="3797604"/>
+            <a:off x="1691640" y="3589498"/>
             <a:ext cx="508000" cy="0"/>
           </a:xfrm>
           <a:prstGeom prst="line">
@@ -24133,14 +24201,14 @@
       </p:cxnSp>
       <p:cxnSp>
         <p:nvCxnSpPr>
-          <p:cNvPr id="32" name="Connector 31"/>
+          <p:cNvPr id="34" name="Connector 33"/>
           <p:cNvCxnSpPr/>
           <p:nvPr/>
         </p:nvCxnSpPr>
         <p:spPr>
           <a:xfrm flipV="1">
-            <a:off x="2199640" y="3422548"/>
-            <a:ext cx="508000" cy="375056"/>
+            <a:off x="2199640" y="3268022"/>
+            <a:ext cx="508000" cy="321476"/>
           </a:xfrm>
           <a:prstGeom prst="line">
             <a:avLst/>
@@ -24154,13 +24222,13 @@
       </p:cxnSp>
       <p:cxnSp>
         <p:nvCxnSpPr>
-          <p:cNvPr id="33" name="Connector 32"/>
+          <p:cNvPr id="35" name="Connector 34"/>
           <p:cNvCxnSpPr/>
           <p:nvPr/>
         </p:nvCxnSpPr>
         <p:spPr>
           <a:xfrm>
-            <a:off x="2707640" y="3422548"/>
+            <a:off x="2707640" y="3268022"/>
             <a:ext cx="508000" cy="0"/>
           </a:xfrm>
           <a:prstGeom prst="line">
@@ -24175,13 +24243,13 @@
       </p:cxnSp>
       <p:cxnSp>
         <p:nvCxnSpPr>
-          <p:cNvPr id="34" name="Connector 33"/>
+          <p:cNvPr id="36" name="Connector 35"/>
           <p:cNvCxnSpPr/>
           <p:nvPr/>
         </p:nvCxnSpPr>
         <p:spPr>
           <a:xfrm>
-            <a:off x="3215640" y="3422548"/>
+            <a:off x="3215640" y="3268022"/>
             <a:ext cx="508000" cy="0"/>
           </a:xfrm>
           <a:prstGeom prst="line">
@@ -24196,14 +24264,14 @@
       </p:cxnSp>
       <p:cxnSp>
         <p:nvCxnSpPr>
-          <p:cNvPr id="35" name="Connector 34"/>
+          <p:cNvPr id="37" name="Connector 36"/>
           <p:cNvCxnSpPr/>
           <p:nvPr/>
         </p:nvCxnSpPr>
         <p:spPr>
           <a:xfrm flipV="1">
-            <a:off x="3723640" y="2781147"/>
-            <a:ext cx="508000" cy="641401"/>
+            <a:off x="3723640" y="2718249"/>
+            <a:ext cx="508000" cy="549773"/>
           </a:xfrm>
           <a:prstGeom prst="line">
             <a:avLst/>
@@ -24217,13 +24285,13 @@
       </p:cxnSp>
       <p:cxnSp>
         <p:nvCxnSpPr>
-          <p:cNvPr id="36" name="Connector 35"/>
+          <p:cNvPr id="38" name="Connector 37"/>
           <p:cNvCxnSpPr/>
           <p:nvPr/>
         </p:nvCxnSpPr>
         <p:spPr>
           <a:xfrm>
-            <a:off x="4231640" y="2781147"/>
+            <a:off x="4231640" y="2718249"/>
             <a:ext cx="508000" cy="0"/>
           </a:xfrm>
           <a:prstGeom prst="line">
@@ -24238,13 +24306,13 @@
       </p:cxnSp>
       <p:cxnSp>
         <p:nvCxnSpPr>
-          <p:cNvPr id="37" name="Connector 36"/>
+          <p:cNvPr id="39" name="Connector 38"/>
           <p:cNvCxnSpPr/>
           <p:nvPr/>
         </p:nvCxnSpPr>
         <p:spPr>
           <a:xfrm>
-            <a:off x="4739640" y="2781147"/>
+            <a:off x="4739640" y="2718249"/>
             <a:ext cx="508000" cy="0"/>
           </a:xfrm>
           <a:prstGeom prst="line">
@@ -24259,13 +24327,13 @@
       </p:cxnSp>
       <p:cxnSp>
         <p:nvCxnSpPr>
-          <p:cNvPr id="38" name="Connector 37"/>
+          <p:cNvPr id="40" name="Connector 39"/>
           <p:cNvCxnSpPr/>
           <p:nvPr/>
         </p:nvCxnSpPr>
         <p:spPr>
           <a:xfrm>
-            <a:off x="5247640" y="2781147"/>
+            <a:off x="5247640" y="2718249"/>
             <a:ext cx="508000" cy="0"/>
           </a:xfrm>
           <a:prstGeom prst="line">
@@ -24280,14 +24348,14 @@
       </p:cxnSp>
       <p:cxnSp>
         <p:nvCxnSpPr>
-          <p:cNvPr id="39" name="Connector 38"/>
+          <p:cNvPr id="41" name="Connector 40"/>
           <p:cNvCxnSpPr/>
           <p:nvPr/>
         </p:nvCxnSpPr>
         <p:spPr>
           <a:xfrm flipV="1">
-            <a:off x="5755640" y="2721356"/>
-            <a:ext cx="508000" cy="59791"/>
+            <a:off x="5755640" y="2667000"/>
+            <a:ext cx="508000" cy="51249"/>
           </a:xfrm>
           <a:prstGeom prst="line">
             <a:avLst/>
@@ -24301,7 +24369,7 @@
       </p:cxnSp>
       <p:sp>
         <p:nvSpPr>
-          <p:cNvPr id="40" name="TextBox 39"/>
+          <p:cNvPr id="42" name="TextBox 41"/>
           <p:cNvSpPr txBox="1"/>
           <p:nvPr/>
         </p:nvSpPr>
@@ -24348,7 +24416,7 @@
       </p:sp>
       <p:sp>
         <p:nvSpPr>
-          <p:cNvPr id="41" name="TextBox 40"/>
+          <p:cNvPr id="43" name="TextBox 42"/>
           <p:cNvSpPr txBox="1"/>
           <p:nvPr/>
         </p:nvSpPr>
@@ -24395,7 +24463,7 @@
       </p:sp>
       <p:sp>
         <p:nvSpPr>
-          <p:cNvPr id="42" name="TextBox 41"/>
+          <p:cNvPr id="44" name="TextBox 43"/>
           <p:cNvSpPr txBox="1"/>
           <p:nvPr/>
         </p:nvSpPr>
@@ -24442,7 +24510,7 @@
       </p:sp>
       <p:sp>
         <p:nvSpPr>
-          <p:cNvPr id="43" name="TextBox 42"/>
+          <p:cNvPr id="45" name="TextBox 44"/>
           <p:cNvSpPr txBox="1"/>
           <p:nvPr/>
         </p:nvSpPr>
@@ -24489,7 +24557,7 @@
       </p:sp>
       <p:sp>
         <p:nvSpPr>
-          <p:cNvPr id="44" name="TextBox 43"/>
+          <p:cNvPr id="46" name="TextBox 45"/>
           <p:cNvSpPr txBox="1"/>
           <p:nvPr/>
         </p:nvSpPr>
@@ -24536,7 +24604,7 @@
       </p:sp>
       <p:sp>
         <p:nvSpPr>
-          <p:cNvPr id="45" name="TextBox 44"/>
+          <p:cNvPr id="47" name="TextBox 46"/>
           <p:cNvSpPr txBox="1"/>
           <p:nvPr/>
         </p:nvSpPr>
@@ -24583,7 +24651,7 @@
       </p:sp>
       <p:sp>
         <p:nvSpPr>
-          <p:cNvPr id="46" name="TextBox 45"/>
+          <p:cNvPr id="48" name="TextBox 47"/>
           <p:cNvSpPr txBox="1"/>
           <p:nvPr/>
         </p:nvSpPr>
@@ -24630,7 +24698,7 @@
       </p:sp>
       <p:sp>
         <p:nvSpPr>
-          <p:cNvPr id="47" name="TextBox 46"/>
+          <p:cNvPr id="49" name="TextBox 48"/>
           <p:cNvSpPr txBox="1"/>
           <p:nvPr/>
         </p:nvSpPr>
@@ -24677,7 +24745,7 @@
       </p:sp>
       <p:sp>
         <p:nvSpPr>
-          <p:cNvPr id="48" name="TextBox 47"/>
+          <p:cNvPr id="50" name="TextBox 49"/>
           <p:cNvSpPr txBox="1"/>
           <p:nvPr/>
         </p:nvSpPr>
@@ -24724,7 +24792,7 @@
       </p:sp>
       <p:sp>
         <p:nvSpPr>
-          <p:cNvPr id="49" name="TextBox 48"/>
+          <p:cNvPr id="51" name="TextBox 50"/>
           <p:cNvSpPr txBox="1"/>
           <p:nvPr/>
         </p:nvSpPr>
@@ -24771,13 +24839,13 @@
       </p:sp>
       <p:sp>
         <p:nvSpPr>
-          <p:cNvPr id="50" name="Oval 49"/>
+          <p:cNvPr id="52" name="Oval 51"/>
           <p:cNvSpPr/>
           <p:nvPr/>
         </p:nvSpPr>
         <p:spPr>
           <a:xfrm>
-            <a:off x="1627632" y="3733596"/>
+            <a:off x="1627632" y="3525490"/>
             <a:ext cx="128016" cy="128016"/>
           </a:xfrm>
           <a:prstGeom prst="ellipse">
@@ -24802,13 +24870,13 @@
       </p:sp>
       <p:sp>
         <p:nvSpPr>
-          <p:cNvPr id="51" name="TextBox 50"/>
-          <p:cNvSpPr txBox="1"/>
-          <p:nvPr/>
-        </p:nvSpPr>
-        <p:spPr>
-          <a:xfrm>
-            <a:off x="1325880" y="3889044"/>
+          <p:cNvPr id="53" name="TextBox 52"/>
+          <p:cNvSpPr txBox="1"/>
+          <p:nvPr/>
+        </p:nvSpPr>
+        <p:spPr>
+          <a:xfrm>
+            <a:off x="1325880" y="3680938"/>
             <a:ext cx="731520" cy="201168"/>
           </a:xfrm>
           <a:prstGeom prst="rect">
@@ -24849,13 +24917,13 @@
       </p:sp>
       <p:sp>
         <p:nvSpPr>
-          <p:cNvPr id="52" name="Oval 51"/>
+          <p:cNvPr id="54" name="Oval 53"/>
           <p:cNvSpPr/>
           <p:nvPr/>
         </p:nvSpPr>
         <p:spPr>
           <a:xfrm>
-            <a:off x="2643632" y="3358540"/>
+            <a:off x="2643632" y="3204014"/>
             <a:ext cx="128016" cy="128016"/>
           </a:xfrm>
           <a:prstGeom prst="ellipse">
@@ -24880,13 +24948,13 @@
       </p:sp>
       <p:sp>
         <p:nvSpPr>
-          <p:cNvPr id="53" name="TextBox 52"/>
-          <p:cNvSpPr txBox="1"/>
-          <p:nvPr/>
-        </p:nvSpPr>
-        <p:spPr>
-          <a:xfrm>
-            <a:off x="2341880" y="3148228"/>
+          <p:cNvPr id="55" name="TextBox 54"/>
+          <p:cNvSpPr txBox="1"/>
+          <p:nvPr/>
+        </p:nvSpPr>
+        <p:spPr>
+          <a:xfrm>
+            <a:off x="2341880" y="2993702"/>
             <a:ext cx="731520" cy="201168"/>
           </a:xfrm>
           <a:prstGeom prst="rect">
@@ -24927,13 +24995,13 @@
       </p:sp>
       <p:sp>
         <p:nvSpPr>
-          <p:cNvPr id="54" name="Oval 53"/>
+          <p:cNvPr id="56" name="Oval 55"/>
           <p:cNvSpPr/>
           <p:nvPr/>
         </p:nvSpPr>
         <p:spPr>
           <a:xfrm>
-            <a:off x="3151632" y="4081475"/>
+            <a:off x="3151632" y="3823672"/>
             <a:ext cx="128016" cy="128016"/>
           </a:xfrm>
           <a:prstGeom prst="ellipse">
@@ -24958,13 +25026,13 @@
       </p:sp>
       <p:sp>
         <p:nvSpPr>
-          <p:cNvPr id="55" name="TextBox 54"/>
-          <p:cNvSpPr txBox="1"/>
-          <p:nvPr/>
-        </p:nvSpPr>
-        <p:spPr>
-          <a:xfrm>
-            <a:off x="2849880" y="3871163"/>
+          <p:cNvPr id="57" name="TextBox 56"/>
+          <p:cNvSpPr txBox="1"/>
+          <p:nvPr/>
+        </p:nvSpPr>
+        <p:spPr>
+          <a:xfrm>
+            <a:off x="2849880" y="3613360"/>
             <a:ext cx="731520" cy="201168"/>
           </a:xfrm>
           <a:prstGeom prst="rect">
@@ -25005,13 +25073,91 @@
       </p:sp>
       <p:sp>
         <p:nvSpPr>
-          <p:cNvPr id="56" name="Oval 55"/>
+          <p:cNvPr id="58" name="Oval 57"/>
           <p:cNvSpPr/>
           <p:nvPr/>
         </p:nvSpPr>
         <p:spPr>
           <a:xfrm>
-            <a:off x="4167632" y="2717139"/>
+            <a:off x="3659632" y="4135831"/>
+            <a:ext cx="128016" cy="128016"/>
+          </a:xfrm>
+          <a:prstGeom prst="ellipse">
+            <a:avLst/>
+          </a:prstGeom>
+          <a:solidFill>
+            <a:srgbClr val="D94A3D"/>
+          </a:solidFill>
+          <a:ln w="15875">
+            <a:solidFill>
+              <a:srgbClr val="FFFFFF"/>
+            </a:solidFill>
+          </a:ln>
+        </p:spPr>
+        <p:txBody>
+          <a:bodyPr rtlCol="0" anchor="ctr"/>
+          <a:lstStyle/>
+          <a:p>
+            <a:pPr algn="ctr"/>
+          </a:p>
+        </p:txBody>
+      </p:sp>
+      <p:sp>
+        <p:nvSpPr>
+          <p:cNvPr id="59" name="TextBox 58"/>
+          <p:cNvSpPr txBox="1"/>
+          <p:nvPr/>
+        </p:nvSpPr>
+        <p:spPr>
+          <a:xfrm>
+            <a:off x="3357880" y="3925519"/>
+            <a:ext cx="731520" cy="201168"/>
+          </a:xfrm>
+          <a:prstGeom prst="rect">
+            <a:avLst/>
+          </a:prstGeom>
+          <a:noFill/>
+        </p:spPr>
+        <p:txBody>
+          <a:bodyPr wrap="square" anchor="ctr" lIns="0" tIns="0" rIns="0" bIns="0">
+            <a:noAutofit/>
+          </a:bodyPr>
+          <a:lstStyle/>
+          <a:p>
+            <a:pPr algn="ctr" latinLnBrk="0">
+              <a:lnSpc>
+                <a:spcPct val="100000"/>
+              </a:lnSpc>
+              <a:spcBef>
+                <a:spcPts val="0"/>
+              </a:spcBef>
+              <a:spcAft>
+                <a:spcPts val="0"/>
+              </a:spcAft>
+            </a:pPr>
+            <a:r>
+              <a:rPr sz="950" b="1">
+                <a:solidFill>
+                  <a:srgbClr val="D94A3D"/>
+                </a:solidFill>
+                <a:latin typeface="Arial"/>
+                <a:ea typeface="Microsoft YaHei"/>
+                <a:cs typeface="Microsoft YaHei"/>
+              </a:rPr>
+              <a:t>0.401</a:t>
+            </a:r>
+          </a:p>
+        </p:txBody>
+      </p:sp>
+      <p:sp>
+        <p:nvSpPr>
+          <p:cNvPr id="60" name="Oval 59"/>
+          <p:cNvSpPr/>
+          <p:nvPr/>
+        </p:nvSpPr>
+        <p:spPr>
+          <a:xfrm>
+            <a:off x="4167632" y="2654241"/>
             <a:ext cx="128016" cy="128016"/>
           </a:xfrm>
           <a:prstGeom prst="ellipse">
@@ -25036,13 +25182,13 @@
       </p:sp>
       <p:sp>
         <p:nvSpPr>
-          <p:cNvPr id="57" name="TextBox 56"/>
-          <p:cNvSpPr txBox="1"/>
-          <p:nvPr/>
-        </p:nvSpPr>
-        <p:spPr>
-          <a:xfrm>
-            <a:off x="3865880" y="2506827"/>
+          <p:cNvPr id="61" name="TextBox 60"/>
+          <p:cNvSpPr txBox="1"/>
+          <p:nvPr/>
+        </p:nvSpPr>
+        <p:spPr>
+          <a:xfrm>
+            <a:off x="3865880" y="2443929"/>
             <a:ext cx="731520" cy="201168"/>
           </a:xfrm>
           <a:prstGeom prst="rect">
@@ -25083,13 +25229,13 @@
       </p:sp>
       <p:sp>
         <p:nvSpPr>
-          <p:cNvPr id="58" name="Oval 57"/>
+          <p:cNvPr id="62" name="Oval 61"/>
           <p:cNvSpPr/>
           <p:nvPr/>
         </p:nvSpPr>
         <p:spPr>
           <a:xfrm>
-            <a:off x="4675632" y="2722575"/>
+            <a:off x="4675632" y="2658901"/>
             <a:ext cx="128016" cy="128016"/>
           </a:xfrm>
           <a:prstGeom prst="ellipse">
@@ -25114,13 +25260,13 @@
       </p:sp>
       <p:sp>
         <p:nvSpPr>
-          <p:cNvPr id="59" name="Oval 58"/>
+          <p:cNvPr id="63" name="Oval 62"/>
           <p:cNvSpPr/>
           <p:nvPr/>
         </p:nvSpPr>
         <p:spPr>
           <a:xfrm>
-            <a:off x="6176772" y="2634488"/>
+            <a:off x="6176772" y="2580132"/>
             <a:ext cx="173736" cy="173736"/>
           </a:xfrm>
           <a:prstGeom prst="ellipse">
@@ -25145,13 +25291,13 @@
       </p:sp>
       <p:sp>
         <p:nvSpPr>
-          <p:cNvPr id="60" name="TextBox 59"/>
-          <p:cNvSpPr txBox="1"/>
-          <p:nvPr/>
-        </p:nvSpPr>
-        <p:spPr>
-          <a:xfrm>
-            <a:off x="5897879" y="2447036"/>
+          <p:cNvPr id="64" name="TextBox 63"/>
+          <p:cNvSpPr txBox="1"/>
+          <p:nvPr/>
+        </p:nvSpPr>
+        <p:spPr>
+          <a:xfrm>
+            <a:off x="5897879" y="2392680"/>
             <a:ext cx="731520" cy="201168"/>
           </a:xfrm>
           <a:prstGeom prst="rect">
@@ -25192,7 +25338,7 @@
       </p:sp>
       <p:sp>
         <p:nvSpPr>
-          <p:cNvPr id="61" name="TextBox 60"/>
+          <p:cNvPr id="65" name="TextBox 64"/>
           <p:cNvSpPr txBox="1"/>
           <p:nvPr/>
         </p:nvSpPr>
@@ -25294,7 +25440,7 @@
       </p:sp>
       <p:sp>
         <p:nvSpPr>
-          <p:cNvPr id="62" name="Rectangle 61"/>
+          <p:cNvPr id="66" name="Rectangle 65"/>
           <p:cNvSpPr/>
           <p:nvPr/>
         </p:nvSpPr>
@@ -25323,7 +25469,7 @@
       </p:sp>
       <p:sp>
         <p:nvSpPr>
-          <p:cNvPr id="63" name="TextBox 62"/>
+          <p:cNvPr id="67" name="TextBox 66"/>
           <p:cNvSpPr txBox="1"/>
           <p:nvPr/>
         </p:nvSpPr>
@@ -25381,7 +25527,7 @@
       </p:sp>
       <p:sp>
         <p:nvSpPr>
-          <p:cNvPr id="64" name="TextBox 63"/>
+          <p:cNvPr id="68" name="TextBox 67"/>
           <p:cNvSpPr txBox="1"/>
           <p:nvPr/>
         </p:nvSpPr>
@@ -25428,7 +25574,7 @@
       </p:sp>
       <p:sp>
         <p:nvSpPr>
-          <p:cNvPr id="65" name="TextBox 64"/>
+          <p:cNvPr id="69" name="TextBox 68"/>
           <p:cNvSpPr txBox="1"/>
           <p:nvPr/>
         </p:nvSpPr>
@@ -25475,7 +25621,7 @@
       </p:sp>
       <p:sp>
         <p:nvSpPr>
-          <p:cNvPr id="66" name="TextBox 65"/>
+          <p:cNvPr id="70" name="TextBox 69"/>
           <p:cNvSpPr txBox="1"/>
           <p:nvPr/>
         </p:nvSpPr>
@@ -25522,7 +25668,7 @@
       </p:sp>
       <p:sp>
         <p:nvSpPr>
-          <p:cNvPr id="67" name="TextBox 66"/>
+          <p:cNvPr id="71" name="TextBox 70"/>
           <p:cNvSpPr txBox="1"/>
           <p:nvPr/>
         </p:nvSpPr>
@@ -25569,7 +25715,7 @@
       </p:sp>
       <p:sp>
         <p:nvSpPr>
-          <p:cNvPr id="68" name="TextBox 67"/>
+          <p:cNvPr id="72" name="TextBox 71"/>
           <p:cNvSpPr txBox="1"/>
           <p:nvPr/>
         </p:nvSpPr>
@@ -25616,7 +25762,7 @@
       </p:sp>
       <p:sp>
         <p:nvSpPr>
-          <p:cNvPr id="69" name="TextBox 68"/>
+          <p:cNvPr id="73" name="TextBox 72"/>
           <p:cNvSpPr txBox="1"/>
           <p:nvPr/>
         </p:nvSpPr>
@@ -25663,7 +25809,7 @@
       </p:sp>
       <p:sp>
         <p:nvSpPr>
-          <p:cNvPr id="70" name="TextBox 69"/>
+          <p:cNvPr id="74" name="TextBox 73"/>
           <p:cNvSpPr txBox="1"/>
           <p:nvPr/>
         </p:nvSpPr>
@@ -25710,7 +25856,7 @@
       </p:sp>
       <p:sp>
         <p:nvSpPr>
-          <p:cNvPr id="71" name="TextBox 70"/>
+          <p:cNvPr id="75" name="TextBox 74"/>
           <p:cNvSpPr txBox="1"/>
           <p:nvPr/>
         </p:nvSpPr>
@@ -25757,7 +25903,7 @@
       </p:sp>
       <p:sp>
         <p:nvSpPr>
-          <p:cNvPr id="72" name="TextBox 71"/>
+          <p:cNvPr id="76" name="TextBox 75"/>
           <p:cNvSpPr txBox="1"/>
           <p:nvPr/>
         </p:nvSpPr>
@@ -25804,7 +25950,7 @@
       </p:sp>
       <p:sp>
         <p:nvSpPr>
-          <p:cNvPr id="73" name="TextBox 72"/>
+          <p:cNvPr id="77" name="TextBox 76"/>
           <p:cNvSpPr txBox="1"/>
           <p:nvPr/>
         </p:nvSpPr>
@@ -25851,7 +25997,7 @@
       </p:sp>
       <p:sp>
         <p:nvSpPr>
-          <p:cNvPr id="74" name="TextBox 73"/>
+          <p:cNvPr id="78" name="TextBox 77"/>
           <p:cNvSpPr txBox="1"/>
           <p:nvPr/>
         </p:nvSpPr>
@@ -25898,7 +26044,7 @@
       </p:sp>
       <p:sp>
         <p:nvSpPr>
-          <p:cNvPr id="75" name="TextBox 74"/>
+          <p:cNvPr id="79" name="TextBox 78"/>
           <p:cNvSpPr txBox="1"/>
           <p:nvPr/>
         </p:nvSpPr>
@@ -25945,7 +26091,7 @@
       </p:sp>
       <p:sp>
         <p:nvSpPr>
-          <p:cNvPr id="76" name="Rectangle 75"/>
+          <p:cNvPr id="80" name="Rectangle 79"/>
           <p:cNvSpPr/>
           <p:nvPr/>
         </p:nvSpPr>
@@ -25974,7 +26120,7 @@
       </p:sp>
       <p:sp>
         <p:nvSpPr>
-          <p:cNvPr id="77" name="TextBox 76"/>
+          <p:cNvPr id="81" name="TextBox 80"/>
           <p:cNvSpPr txBox="1"/>
           <p:nvPr/>
         </p:nvSpPr>
@@ -26021,7 +26167,7 @@
       </p:sp>
       <p:sp>
         <p:nvSpPr>
-          <p:cNvPr id="78" name="TextBox 77"/>
+          <p:cNvPr id="82" name="TextBox 81"/>
           <p:cNvSpPr txBox="1"/>
           <p:nvPr/>
         </p:nvSpPr>
@@ -26068,7 +26214,7 @@
       </p:sp>
       <p:sp>
         <p:nvSpPr>
-          <p:cNvPr id="79" name="TextBox 78"/>
+          <p:cNvPr id="83" name="TextBox 82"/>
           <p:cNvSpPr txBox="1"/>
           <p:nvPr/>
         </p:nvSpPr>
@@ -26115,7 +26261,7 @@
       </p:sp>
       <p:sp>
         <p:nvSpPr>
-          <p:cNvPr id="80" name="TextBox 79"/>
+          <p:cNvPr id="84" name="TextBox 83"/>
           <p:cNvSpPr txBox="1"/>
           <p:nvPr/>
         </p:nvSpPr>
@@ -26162,7 +26308,7 @@
       </p:sp>
       <p:sp>
         <p:nvSpPr>
-          <p:cNvPr id="81" name="Rectangle 80"/>
+          <p:cNvPr id="85" name="Rectangle 84"/>
           <p:cNvSpPr/>
           <p:nvPr/>
         </p:nvSpPr>
@@ -26191,7 +26337,7 @@
       </p:sp>
       <p:sp>
         <p:nvSpPr>
-          <p:cNvPr id="82" name="TextBox 81"/>
+          <p:cNvPr id="86" name="TextBox 85"/>
           <p:cNvSpPr txBox="1"/>
           <p:nvPr/>
         </p:nvSpPr>
@@ -26238,7 +26384,7 @@
       </p:sp>
       <p:sp>
         <p:nvSpPr>
-          <p:cNvPr id="83" name="TextBox 82"/>
+          <p:cNvPr id="87" name="TextBox 86"/>
           <p:cNvSpPr txBox="1"/>
           <p:nvPr/>
         </p:nvSpPr>
@@ -26285,7 +26431,7 @@
       </p:sp>
       <p:sp>
         <p:nvSpPr>
-          <p:cNvPr id="84" name="TextBox 83"/>
+          <p:cNvPr id="88" name="TextBox 87"/>
           <p:cNvSpPr txBox="1"/>
           <p:nvPr/>
         </p:nvSpPr>
@@ -26332,7 +26478,7 @@
       </p:sp>
       <p:sp>
         <p:nvSpPr>
-          <p:cNvPr id="85" name="TextBox 84"/>
+          <p:cNvPr id="89" name="TextBox 88"/>
           <p:cNvSpPr txBox="1"/>
           <p:nvPr/>
         </p:nvSpPr>
@@ -26379,7 +26525,7 @@
       </p:sp>
       <p:sp>
         <p:nvSpPr>
-          <p:cNvPr id="86" name="TextBox 85"/>
+          <p:cNvPr id="90" name="TextBox 89"/>
           <p:cNvSpPr txBox="1"/>
           <p:nvPr/>
         </p:nvSpPr>
@@ -26426,7 +26572,7 @@
       </p:sp>
       <p:sp>
         <p:nvSpPr>
-          <p:cNvPr id="87" name="TextBox 86"/>
+          <p:cNvPr id="91" name="TextBox 90"/>
           <p:cNvSpPr txBox="1"/>
           <p:nvPr/>
         </p:nvSpPr>
@@ -26473,7 +26619,7 @@
       </p:sp>
       <p:sp>
         <p:nvSpPr>
-          <p:cNvPr id="88" name="TextBox 87"/>
+          <p:cNvPr id="92" name="TextBox 91"/>
           <p:cNvSpPr txBox="1"/>
           <p:nvPr/>
         </p:nvSpPr>
@@ -26520,7 +26666,7 @@
       </p:sp>
       <p:sp>
         <p:nvSpPr>
-          <p:cNvPr id="89" name="TextBox 88"/>
+          <p:cNvPr id="93" name="TextBox 92"/>
           <p:cNvSpPr txBox="1"/>
           <p:nvPr/>
         </p:nvSpPr>
@@ -26567,7 +26713,7 @@
       </p:sp>
       <p:sp>
         <p:nvSpPr>
-          <p:cNvPr id="90" name="TextBox 89"/>
+          <p:cNvPr id="94" name="TextBox 93"/>
           <p:cNvSpPr txBox="1"/>
           <p:nvPr/>
         </p:nvSpPr>
@@ -26614,7 +26760,7 @@
       </p:sp>
       <p:sp>
         <p:nvSpPr>
-          <p:cNvPr id="91" name="TextBox 90"/>
+          <p:cNvPr id="95" name="TextBox 94"/>
           <p:cNvSpPr txBox="1"/>
           <p:nvPr/>
         </p:nvSpPr>
@@ -26661,7 +26807,7 @@
       </p:sp>
       <p:sp>
         <p:nvSpPr>
-          <p:cNvPr id="92" name="TextBox 91"/>
+          <p:cNvPr id="96" name="TextBox 95"/>
           <p:cNvSpPr txBox="1"/>
           <p:nvPr/>
         </p:nvSpPr>
@@ -26708,7 +26854,7 @@
       </p:sp>
       <p:sp>
         <p:nvSpPr>
-          <p:cNvPr id="93" name="TextBox 92"/>
+          <p:cNvPr id="97" name="TextBox 96"/>
           <p:cNvSpPr txBox="1"/>
           <p:nvPr/>
         </p:nvSpPr>
@@ -26755,7 +26901,7 @@
       </p:sp>
       <p:sp>
         <p:nvSpPr>
-          <p:cNvPr id="94" name="TextBox 93"/>
+          <p:cNvPr id="98" name="TextBox 97"/>
           <p:cNvSpPr txBox="1"/>
           <p:nvPr/>
         </p:nvSpPr>
@@ -26802,7 +26948,7 @@
       </p:sp>
       <p:sp>
         <p:nvSpPr>
-          <p:cNvPr id="95" name="TextBox 94"/>
+          <p:cNvPr id="99" name="TextBox 98"/>
           <p:cNvSpPr txBox="1"/>
           <p:nvPr/>
         </p:nvSpPr>
@@ -26849,7 +26995,7 @@
       </p:sp>
       <p:sp>
         <p:nvSpPr>
-          <p:cNvPr id="96" name="TextBox 95"/>
+          <p:cNvPr id="100" name="TextBox 99"/>
           <p:cNvSpPr txBox="1"/>
           <p:nvPr/>
         </p:nvSpPr>
@@ -26896,7 +27042,7 @@
       </p:sp>
       <p:sp>
         <p:nvSpPr>
-          <p:cNvPr id="97" name="TextBox 96"/>
+          <p:cNvPr id="101" name="TextBox 100"/>
           <p:cNvSpPr txBox="1"/>
           <p:nvPr/>
         </p:nvSpPr>
@@ -26943,7 +27089,7 @@
       </p:sp>
       <p:sp>
         <p:nvSpPr>
-          <p:cNvPr id="98" name="Rectangle 97"/>
+          <p:cNvPr id="102" name="Rectangle 101"/>
           <p:cNvSpPr/>
           <p:nvPr/>
         </p:nvSpPr>
@@ -26972,7 +27118,7 @@
       </p:sp>
       <p:sp>
         <p:nvSpPr>
-          <p:cNvPr id="99" name="TextBox 98"/>
+          <p:cNvPr id="103" name="TextBox 102"/>
           <p:cNvSpPr txBox="1"/>
           <p:nvPr/>
         </p:nvSpPr>
@@ -27019,7 +27165,7 @@
       </p:sp>
       <p:sp>
         <p:nvSpPr>
-          <p:cNvPr id="100" name="TextBox 99"/>
+          <p:cNvPr id="104" name="TextBox 103"/>
           <p:cNvSpPr txBox="1"/>
           <p:nvPr/>
         </p:nvSpPr>
@@ -27066,7 +27212,7 @@
       </p:sp>
       <p:sp>
         <p:nvSpPr>
-          <p:cNvPr id="101" name="TextBox 100"/>
+          <p:cNvPr id="105" name="TextBox 104"/>
           <p:cNvSpPr txBox="1"/>
           <p:nvPr/>
         </p:nvSpPr>
@@ -27113,7 +27259,7 @@
       </p:sp>
       <p:sp>
         <p:nvSpPr>
-          <p:cNvPr id="102" name="TextBox 101"/>
+          <p:cNvPr id="106" name="TextBox 105"/>
           <p:cNvSpPr txBox="1"/>
           <p:nvPr/>
         </p:nvSpPr>
@@ -27160,7 +27306,7 @@
       </p:sp>
       <p:sp>
         <p:nvSpPr>
-          <p:cNvPr id="103" name="TextBox 102"/>
+          <p:cNvPr id="107" name="TextBox 106"/>
           <p:cNvSpPr txBox="1"/>
           <p:nvPr/>
         </p:nvSpPr>
@@ -27255,7 +27401,7 @@
       </p:sp>
       <p:sp>
         <p:nvSpPr>
-          <p:cNvPr id="104" name="Rectangle 103"/>
+          <p:cNvPr id="108" name="Rectangle 107"/>
           <p:cNvSpPr/>
           <p:nvPr/>
         </p:nvSpPr>
@@ -27286,7 +27432,7 @@
       </p:sp>
       <p:sp>
         <p:nvSpPr>
-          <p:cNvPr id="105" name="TextBox 104"/>
+          <p:cNvPr id="109" name="TextBox 108"/>
           <p:cNvSpPr txBox="1"/>
           <p:nvPr/>
         </p:nvSpPr>
@@ -27333,7 +27479,7 @@
       </p:sp>
       <p:sp>
         <p:nvSpPr>
-          <p:cNvPr id="106" name="TextBox 105"/>
+          <p:cNvPr id="110" name="TextBox 109"/>
           <p:cNvSpPr txBox="1"/>
           <p:nvPr/>
         </p:nvSpPr>
@@ -27380,7 +27526,7 @@
       </p:sp>
       <p:sp>
         <p:nvSpPr>
-          <p:cNvPr id="107" name="TextBox 106"/>
+          <p:cNvPr id="111" name="TextBox 110"/>
           <p:cNvSpPr txBox="1"/>
           <p:nvPr/>
         </p:nvSpPr>
@@ -27427,7 +27573,7 @@
       </p:sp>
       <p:sp>
         <p:nvSpPr>
-          <p:cNvPr id="108" name="Rectangle 107"/>
+          <p:cNvPr id="112" name="Rectangle 111"/>
           <p:cNvSpPr/>
           <p:nvPr/>
         </p:nvSpPr>
@@ -27458,7 +27604,7 @@
       </p:sp>
       <p:sp>
         <p:nvSpPr>
-          <p:cNvPr id="109" name="TextBox 108"/>
+          <p:cNvPr id="113" name="TextBox 112"/>
           <p:cNvSpPr txBox="1"/>
           <p:nvPr/>
         </p:nvSpPr>
@@ -27505,7 +27651,7 @@
       </p:sp>
       <p:sp>
         <p:nvSpPr>
-          <p:cNvPr id="110" name="TextBox 109"/>
+          <p:cNvPr id="114" name="TextBox 113"/>
           <p:cNvSpPr txBox="1"/>
           <p:nvPr/>
         </p:nvSpPr>
@@ -27552,7 +27698,7 @@
       </p:sp>
       <p:sp>
         <p:nvSpPr>
-          <p:cNvPr id="111" name="TextBox 110"/>
+          <p:cNvPr id="115" name="TextBox 114"/>
           <p:cNvSpPr txBox="1"/>
           <p:nvPr/>
         </p:nvSpPr>
@@ -27599,7 +27745,7 @@
       </p:sp>
       <p:sp>
         <p:nvSpPr>
-          <p:cNvPr id="112" name="Rectangle 111"/>
+          <p:cNvPr id="116" name="Rectangle 115"/>
           <p:cNvSpPr/>
           <p:nvPr/>
         </p:nvSpPr>
@@ -27630,7 +27776,7 @@
       </p:sp>
       <p:sp>
         <p:nvSpPr>
-          <p:cNvPr id="113" name="TextBox 112"/>
+          <p:cNvPr id="117" name="TextBox 116"/>
           <p:cNvSpPr txBox="1"/>
           <p:nvPr/>
         </p:nvSpPr>
@@ -27677,7 +27823,7 @@
       </p:sp>
       <p:sp>
         <p:nvSpPr>
-          <p:cNvPr id="114" name="TextBox 113"/>
+          <p:cNvPr id="118" name="TextBox 117"/>
           <p:cNvSpPr txBox="1"/>
           <p:nvPr/>
         </p:nvSpPr>
@@ -27724,7 +27870,7 @@
       </p:sp>
       <p:sp>
         <p:nvSpPr>
-          <p:cNvPr id="115" name="TextBox 114"/>
+          <p:cNvPr id="119" name="TextBox 118"/>
           <p:cNvSpPr txBox="1"/>
           <p:nvPr/>
         </p:nvSpPr>
@@ -27771,7 +27917,7 @@
       </p:sp>
       <p:sp>
         <p:nvSpPr>
-          <p:cNvPr id="116" name="Rectangle 115"/>
+          <p:cNvPr id="120" name="Rectangle 119"/>
           <p:cNvSpPr/>
           <p:nvPr/>
         </p:nvSpPr>
@@ -27800,7 +27946,7 @@
       </p:sp>
       <p:sp>
         <p:nvSpPr>
-          <p:cNvPr id="117" name="TextBox 116"/>
+          <p:cNvPr id="121" name="TextBox 120"/>
           <p:cNvSpPr txBox="1"/>
           <p:nvPr/>
         </p:nvSpPr>
@@ -27847,7 +27993,7 @@
       </p:sp>
       <p:sp>
         <p:nvSpPr>
-          <p:cNvPr id="118" name="TextBox 117"/>
+          <p:cNvPr id="122" name="TextBox 121"/>
           <p:cNvSpPr txBox="1"/>
           <p:nvPr/>
         </p:nvSpPr>
@@ -27894,7 +28040,7 @@
       </p:sp>
       <p:sp>
         <p:nvSpPr>
-          <p:cNvPr id="119" name="TextBox 118"/>
+          <p:cNvPr id="123" name="TextBox 122"/>
           <p:cNvSpPr txBox="1"/>
           <p:nvPr/>
         </p:nvSpPr>
@@ -27941,7 +28087,7 @@
       </p:sp>
       <p:sp>
         <p:nvSpPr>
-          <p:cNvPr id="120" name="Rectangle 119"/>
+          <p:cNvPr id="124" name="Rectangle 123"/>
           <p:cNvSpPr/>
           <p:nvPr/>
         </p:nvSpPr>
@@ -27970,7 +28116,7 @@
       </p:sp>
       <p:sp>
         <p:nvSpPr>
-          <p:cNvPr id="121" name="Rectangle 120"/>
+          <p:cNvPr id="125" name="Rectangle 124"/>
           <p:cNvSpPr/>
           <p:nvPr/>
         </p:nvSpPr>
@@ -27999,7 +28145,7 @@
       </p:sp>
       <p:sp>
         <p:nvSpPr>
-          <p:cNvPr id="122" name="TextBox 121"/>
+          <p:cNvPr id="126" name="TextBox 125"/>
           <p:cNvSpPr txBox="1"/>
           <p:nvPr/>
         </p:nvSpPr>
@@ -28057,7 +28203,7 @@
       </p:sp>
       <p:sp>
         <p:nvSpPr>
-          <p:cNvPr id="123" name="TextBox 122"/>
+          <p:cNvPr id="127" name="TextBox 126"/>
           <p:cNvSpPr txBox="1"/>
           <p:nvPr/>
         </p:nvSpPr>
@@ -28097,14 +28243,14 @@
                 <a:ea typeface="Microsoft YaHei"/>
                 <a:cs typeface="Microsoft YaHei"/>
               </a:rPr>
-              <a:t>第 4 轮的 17.60 µs 是 H2D 传输本身，不是 kernel 耗时；交付复测、地板探针、下排 shape 表各为独立批次，0.730 与 0.724 不应互相换算</a:t>
-            </a:r>
-          </a:p>
-        </p:txBody>
-      </p:sp>
-      <p:sp>
-        <p:nvSpPr>
-          <p:cNvPr id="124" name="TextBox 123"/>
+              <a:t>第 4 轮的 17.60 µs 含每次调用的 H2D 上传，不只是 kernel 本身；交付复测、地板探针、下排 shape 表各为独立批次，0.730 与 0.724 不应互相换算</a:t>
+            </a:r>
+          </a:p>
+        </p:txBody>
+      </p:sp>
+      <p:sp>
+        <p:nvSpPr>
+          <p:cNvPr id="128" name="TextBox 127"/>
           <p:cNvSpPr txBox="1"/>
           <p:nvPr/>
         </p:nvSpPr>

--- a/slides/m100_agent_deck_1024.pptx
+++ b/slides/m100_agent_deck_1024.pptx
@@ -2323,7 +2323,7 @@
                 <a:ea typeface="Microsoft YaHei"/>
                 <a:cs typeface="Microsoft YaHei"/>
               </a:rPr>
-              <a:t>【6 / 10 · 算子层 · 生成与迭代 · 约 105 秒（1:45）】</a:t>
+              <a:t>【6 / 10 · 算子层 · 生成与迭代 · 约 100 秒（1:40）】</a:t>
             </a:r>
           </a:p>
           <a:p>
@@ -2413,7 +2413,7 @@
                 <a:ea typeface="Microsoft YaHei"/>
                 <a:cs typeface="Microsoft YaHei"/>
               </a:rPr>
-              <a:t>右边是目前的实测样例，RMSNorm：固定 4096 乘 4096 的负载，相对基线加速 1.24 倍，741.2 微秒降到 595.6。最优版本重复测了两次，595.64 和 595.63，结果接近。这是单算子样例，还没有规模化统计，所以这里不报聚合指标。</a:t>
+              <a:t>右边是目前的实测样例，batch_norm：固定 256 乘 4096 的负载，fp32，相对 batch_norm_v4 基线加速 1.37 倍，13.24 微秒降到 9.66。这是单算子样例，还没有规模化统计，所以这里不报聚合指标。</a:t>
             </a:r>
           </a:p>
           <a:p>
@@ -2467,7 +2467,7 @@
                 <a:ea typeface="Microsoft YaHei"/>
                 <a:cs typeface="Microsoft YaHei"/>
               </a:rPr>
-              <a:t>1.24 倍的基线是哪一个实现，需要讲清楚：相对未调优实现、相对现有库实现、还是相对第 0 轮反推出来的规格，结论的分量完全不同。</a:t>
+              <a:t>1.37 倍的基线是 batch_norm_v4 的 13.24 微秒，不是现有库实现，也不是未调优的草稿，被问到时按这个口径回答。</a:t>
             </a:r>
           </a:p>
           <a:p>
@@ -2485,7 +2485,7 @@
                 <a:ea typeface="Microsoft YaHei"/>
                 <a:cs typeface="Microsoft YaHei"/>
               </a:rPr>
-              <a:t>最优版本只重复测了两次。两次接近说明没有明显抖动，但不足以支撑噪声水平的结论，被追问时按实际重复次数回答，不要说成已验证稳定。</a:t>
+              <a:t>9.66 微秒是在空闲卡上复测 200 次的结果。这能说明没有明显抖动，但不同卡况之间仍有差异，被追问时按实际测量条件回答，不要说成已验证稳定。</a:t>
             </a:r>
           </a:p>
           <a:p>
@@ -22476,7 +22476,7 @@
                 <a:ea typeface="Microsoft YaHei"/>
                 <a:cs typeface="Microsoft YaHei"/>
               </a:rPr>
-              <a:t>RMSNorm 实测样例</a:t>
+              <a:t>batch_norm 实测样例</a:t>
             </a:r>
             <a:r>
               <a:rPr sz="1050" b="0">
@@ -22589,7 +22589,7 @@
                 <a:ea typeface="Microsoft YaHei"/>
                 <a:cs typeface="Microsoft YaHei"/>
               </a:rPr>
-              <a:t>4096 × 4096</a:t>
+              <a:t>256 × 4096</a:t>
             </a:r>
           </a:p>
           <a:p>
@@ -22613,7 +22613,7 @@
                 <a:ea typeface="Microsoft YaHei"/>
                 <a:cs typeface="Microsoft YaHei"/>
               </a:rPr>
-              <a:t>BF16 + gamma · 6 SDNN</a:t>
+              <a:t>fp32 · 总流量 8.39 MB</a:t>
             </a:r>
           </a:p>
         </p:txBody>
@@ -22713,7 +22713,7 @@
                 <a:ea typeface="Microsoft YaHei"/>
                 <a:cs typeface="Microsoft YaHei"/>
               </a:rPr>
-              <a:t>1.24×</a:t>
+              <a:t>1.37×</a:t>
             </a:r>
           </a:p>
           <a:p>
@@ -22737,7 +22737,7 @@
                 <a:ea typeface="Microsoft YaHei"/>
                 <a:cs typeface="Microsoft YaHei"/>
               </a:rPr>
-              <a:t>741.2 → 595.6 µs</a:t>
+              <a:t>13.24 → 9.66 µs</a:t>
             </a:r>
           </a:p>
         </p:txBody>
@@ -22839,7 +22839,7 @@
                 <a:ea typeface="Microsoft YaHei"/>
                 <a:cs typeface="Microsoft YaHei"/>
               </a:rPr>
-              <a:t>595.64 / 595.63 µs</a:t>
+              <a:t>9.66 µs · iters=200</a:t>
             </a:r>
           </a:p>
           <a:p>
@@ -22863,7 +22863,7 @@
                 <a:ea typeface="Microsoft YaHei"/>
                 <a:cs typeface="Microsoft YaHei"/>
               </a:rPr>
-              <a:t>两次复测结果接近</a:t>
+              <a:t>空闲卡上复测</a:t>
             </a:r>
           </a:p>
         </p:txBody>
@@ -22934,7 +22934,7 @@
                 <a:ea typeface="Microsoft YaHei"/>
                 <a:cs typeface="Microsoft YaHei"/>
               </a:rPr>
-              <a:t>基线实现的口径需在讲述时说明</a:t>
+              <a:t>基线 batch_norm_v4，详见下一页</a:t>
             </a:r>
           </a:p>
         </p:txBody>

--- a/slides/m100_agent_deck_1024.pptx
+++ b/slides/m100_agent_deck_1024.pptx
@@ -2078,7 +2078,7 @@
                 <a:ea typeface="Microsoft YaHei"/>
                 <a:cs typeface="Microsoft YaHei"/>
               </a:rPr>
-              <a:t>【5 / 10 · 模型层 · 候选验收与可信度 · 约 135 秒（2:15）】</a:t>
+              <a:t>【5 / 10 · 模型层 · 候选验收与可信度 · 约 185 秒（3:05）】</a:t>
             </a:r>
           </a:p>
           <a:p>
@@ -2168,7 +2168,7 @@
                 <a:ea typeface="Microsoft YaHei"/>
                 <a:cs typeface="Microsoft YaHei"/>
               </a:rPr>
-              <a:t>右边放这条流水线判出来的实际结果。最后一条口径：只有独立复验通过的收益才进入最终交付，筛选阶段看起来有收益、复验没过的，一个都不算。</a:t>
+              <a:t>右边是这条流水线在 30B-A3B 上判出来的实际结果。五组候选送进去：第一道挡掉一个模式——分组关掉之后 cos 直接是 0，算出来就是错的；第二道这一轮没拦下任何一个，因为过了第一道的候选输出逐位一致，不必再看质量；第三道挡掉三组——强制不分组慢 20%，换现成核只有 0.61 倍更慢，路由融合算到头也只值 0.9%，够不着 3% 的门槛。三道全过的两组交付，峰值吞吐从 1370 涨到 1883。最后一条口径：只有独立复验通过的收益才进入最终交付，筛选阶段看起来有收益、复验没过的，一个都不算。</a:t>
             </a:r>
           </a:p>
           <a:p>
@@ -20904,17 +20904,217 @@
             <a:avLst/>
           </a:prstGeom>
           <a:solidFill>
+            <a:srgbClr val="FFFFFF"/>
+          </a:solidFill>
+          <a:ln>
+            <a:noFill/>
+          </a:ln>
+        </p:spPr>
+        <p:txBody>
+          <a:bodyPr rtlCol="0" anchor="ctr"/>
+          <a:lstStyle/>
+          <a:p>
+            <a:pPr algn="ctr"/>
+          </a:p>
+        </p:txBody>
+      </p:sp>
+      <p:sp>
+        <p:nvSpPr>
+          <p:cNvPr id="36" name="Rectangle 35"/>
+          <p:cNvSpPr/>
+          <p:nvPr/>
+        </p:nvSpPr>
+        <p:spPr>
+          <a:xfrm>
+            <a:off x="7071055" y="1719072"/>
+            <a:ext cx="45720" cy="3822191"/>
+          </a:xfrm>
+          <a:prstGeom prst="rect">
+            <a:avLst/>
+          </a:prstGeom>
+          <a:solidFill>
+            <a:srgbClr val="D4147A"/>
+          </a:solidFill>
+          <a:ln>
+            <a:noFill/>
+          </a:ln>
+        </p:spPr>
+        <p:txBody>
+          <a:bodyPr rtlCol="0" anchor="ctr"/>
+          <a:lstStyle/>
+          <a:p>
+            <a:pPr algn="ctr"/>
+          </a:p>
+        </p:txBody>
+      </p:sp>
+      <p:sp>
+        <p:nvSpPr>
+          <p:cNvPr id="37" name="TextBox 36"/>
+          <p:cNvSpPr txBox="1"/>
+          <p:nvPr/>
+        </p:nvSpPr>
+        <p:spPr>
+          <a:xfrm>
+            <a:off x="7272223" y="1773936"/>
+            <a:ext cx="4169663" cy="256032"/>
+          </a:xfrm>
+          <a:prstGeom prst="rect">
+            <a:avLst/>
+          </a:prstGeom>
+          <a:noFill/>
+        </p:spPr>
+        <p:txBody>
+          <a:bodyPr wrap="square" anchor="ctr" lIns="0" tIns="0" rIns="0" bIns="0">
+            <a:noAutofit/>
+          </a:bodyPr>
+          <a:lstStyle/>
+          <a:p>
+            <a:pPr algn="l" latinLnBrk="0">
+              <a:lnSpc>
+                <a:spcPct val="100000"/>
+              </a:lnSpc>
+              <a:spcBef>
+                <a:spcPts val="0"/>
+              </a:spcBef>
+              <a:spcAft>
+                <a:spcPts val="0"/>
+              </a:spcAft>
+            </a:pPr>
+            <a:r>
+              <a:rPr sz="1250" b="1">
+                <a:solidFill>
+                  <a:srgbClr val="0A2B45"/>
+                </a:solidFill>
+                <a:latin typeface="Microsoft YaHei"/>
+                <a:ea typeface="Microsoft YaHei"/>
+                <a:cs typeface="Microsoft YaHei"/>
+              </a:rPr>
+              <a:t>本轮实际判定</a:t>
+            </a:r>
+            <a:r>
+              <a:rPr sz="1000" b="0">
+                <a:solidFill>
+                  <a:srgbClr val="40708B"/>
+                </a:solidFill>
+                <a:latin typeface="Microsoft YaHei"/>
+                <a:ea typeface="Microsoft YaHei"/>
+                <a:cs typeface="Microsoft YaHei"/>
+              </a:rPr>
+              <a:t>　30B-A3B 单卡</a:t>
+            </a:r>
+          </a:p>
+        </p:txBody>
+      </p:sp>
+      <p:sp>
+        <p:nvSpPr>
+          <p:cNvPr id="38" name="Rectangle 37"/>
+          <p:cNvSpPr/>
+          <p:nvPr/>
+        </p:nvSpPr>
+        <p:spPr>
+          <a:xfrm>
+            <a:off x="7272223" y="2066543"/>
+            <a:ext cx="4169663" cy="292608"/>
+          </a:xfrm>
+          <a:prstGeom prst="rect">
+            <a:avLst/>
+          </a:prstGeom>
+          <a:solidFill>
             <a:srgbClr val="DEEDFA"/>
           </a:solidFill>
-          <a:ln w="9525">
-            <a:solidFill>
-              <a:srgbClr val="AFCEE1"/>
-            </a:solidFill>
-            <a:prstDash val="dash"/>
+          <a:ln>
+            <a:noFill/>
           </a:ln>
         </p:spPr>
         <p:txBody>
-          <a:bodyPr rtlCol="0" anchor="ctr" wrap="square" tIns="36576" bIns="36576">
+          <a:bodyPr rtlCol="0" anchor="ctr"/>
+          <a:lstStyle/>
+          <a:p>
+            <a:pPr algn="ctr"/>
+          </a:p>
+        </p:txBody>
+      </p:sp>
+      <p:sp>
+        <p:nvSpPr>
+          <p:cNvPr id="39" name="TextBox 38"/>
+          <p:cNvSpPr txBox="1"/>
+          <p:nvPr/>
+        </p:nvSpPr>
+        <p:spPr>
+          <a:xfrm>
+            <a:off x="7436815" y="2066543"/>
+            <a:ext cx="3840480" cy="292608"/>
+          </a:xfrm>
+          <a:prstGeom prst="rect">
+            <a:avLst/>
+          </a:prstGeom>
+          <a:noFill/>
+        </p:spPr>
+        <p:txBody>
+          <a:bodyPr wrap="square" anchor="ctr" lIns="0" tIns="0" rIns="0" bIns="0">
+            <a:noAutofit/>
+          </a:bodyPr>
+          <a:lstStyle/>
+          <a:p>
+            <a:pPr algn="l" latinLnBrk="0">
+              <a:lnSpc>
+                <a:spcPct val="100000"/>
+              </a:lnSpc>
+              <a:spcBef>
+                <a:spcPts val="0"/>
+              </a:spcBef>
+              <a:spcAft>
+                <a:spcPts val="0"/>
+              </a:spcAft>
+            </a:pPr>
+            <a:r>
+              <a:rPr sz="1100" b="1">
+                <a:solidFill>
+                  <a:srgbClr val="0A2B45"/>
+                </a:solidFill>
+                <a:latin typeface="Microsoft YaHei"/>
+                <a:ea typeface="Microsoft YaHei"/>
+                <a:cs typeface="Microsoft YaHei"/>
+              </a:rPr>
+              <a:t>送进验收</a:t>
+            </a:r>
+            <a:r>
+              <a:rPr sz="1000" b="0">
+                <a:solidFill>
+                  <a:srgbClr val="40708B"/>
+                </a:solidFill>
+                <a:latin typeface="Microsoft YaHei"/>
+                <a:ea typeface="Microsoft YaHei"/>
+                <a:cs typeface="Microsoft YaHei"/>
+              </a:rPr>
+              <a:t>　五组候选，由便宜到贵逐道验</a:t>
+            </a:r>
+          </a:p>
+        </p:txBody>
+      </p:sp>
+      <p:sp>
+        <p:nvSpPr>
+          <p:cNvPr id="40" name="Oval 39"/>
+          <p:cNvSpPr/>
+          <p:nvPr/>
+        </p:nvSpPr>
+        <p:spPr>
+          <a:xfrm>
+            <a:off x="7308799" y="2459736"/>
+            <a:ext cx="274320" cy="274320"/>
+          </a:xfrm>
+          <a:prstGeom prst="ellipse">
+            <a:avLst/>
+          </a:prstGeom>
+          <a:solidFill>
+            <a:srgbClr val="0F62CE"/>
+          </a:solidFill>
+          <a:ln>
+            <a:noFill/>
+          </a:ln>
+        </p:spPr>
+        <p:txBody>
+          <a:bodyPr rtlCol="0" anchor="ctr" wrap="square" lIns="0" tIns="0" rIns="0" bIns="0">
             <a:noAutofit/>
           </a:bodyPr>
           <a:lstStyle/>
@@ -20931,7 +21131,294 @@
               </a:spcAft>
             </a:pPr>
             <a:r>
-              <a:rPr sz="1300" b="1">
+              <a:rPr sz="1100" b="1">
+                <a:solidFill>
+                  <a:srgbClr val="FFFFFF"/>
+                </a:solidFill>
+                <a:latin typeface="Arial"/>
+                <a:ea typeface="Microsoft YaHei"/>
+                <a:cs typeface="Microsoft YaHei"/>
+              </a:rPr>
+              <a:t>①</a:t>
+            </a:r>
+          </a:p>
+        </p:txBody>
+      </p:sp>
+      <p:sp>
+        <p:nvSpPr>
+          <p:cNvPr id="41" name="TextBox 40"/>
+          <p:cNvSpPr txBox="1"/>
+          <p:nvPr/>
+        </p:nvSpPr>
+        <p:spPr>
+          <a:xfrm>
+            <a:off x="7674559" y="2432304"/>
+            <a:ext cx="1188720" cy="256032"/>
+          </a:xfrm>
+          <a:prstGeom prst="rect">
+            <a:avLst/>
+          </a:prstGeom>
+          <a:noFill/>
+        </p:spPr>
+        <p:txBody>
+          <a:bodyPr wrap="square" anchor="ctr" lIns="0" tIns="0" rIns="0" bIns="0">
+            <a:noAutofit/>
+          </a:bodyPr>
+          <a:lstStyle/>
+          <a:p>
+            <a:pPr algn="l" latinLnBrk="0">
+              <a:lnSpc>
+                <a:spcPct val="100000"/>
+              </a:lnSpc>
+              <a:spcBef>
+                <a:spcPts val="0"/>
+              </a:spcBef>
+              <a:spcAft>
+                <a:spcPts val="0"/>
+              </a:spcAft>
+            </a:pPr>
+            <a:r>
+              <a:rPr sz="1150" b="1">
+                <a:solidFill>
+                  <a:srgbClr val="0A2B45"/>
+                </a:solidFill>
+                <a:latin typeface="Microsoft YaHei"/>
+                <a:ea typeface="Microsoft YaHei"/>
+                <a:cs typeface="Microsoft YaHei"/>
+              </a:rPr>
+              <a:t>输出未变</a:t>
+            </a:r>
+          </a:p>
+        </p:txBody>
+      </p:sp>
+      <p:sp>
+        <p:nvSpPr>
+          <p:cNvPr id="42" name="TextBox 41"/>
+          <p:cNvSpPr txBox="1"/>
+          <p:nvPr/>
+        </p:nvSpPr>
+        <p:spPr>
+          <a:xfrm>
+            <a:off x="10070287" y="2432304"/>
+            <a:ext cx="1371600" cy="256032"/>
+          </a:xfrm>
+          <a:prstGeom prst="rect">
+            <a:avLst/>
+          </a:prstGeom>
+          <a:noFill/>
+        </p:spPr>
+        <p:txBody>
+          <a:bodyPr wrap="square" anchor="ctr" lIns="0" tIns="0" rIns="0" bIns="0">
+            <a:noAutofit/>
+          </a:bodyPr>
+          <a:lstStyle/>
+          <a:p>
+            <a:pPr algn="r" latinLnBrk="0">
+              <a:lnSpc>
+                <a:spcPct val="100000"/>
+              </a:lnSpc>
+              <a:spcBef>
+                <a:spcPts val="0"/>
+              </a:spcBef>
+              <a:spcAft>
+                <a:spcPts val="0"/>
+              </a:spcAft>
+            </a:pPr>
+            <a:r>
+              <a:rPr sz="1100" b="1">
+                <a:solidFill>
+                  <a:srgbClr val="D94A3D"/>
+                </a:solidFill>
+                <a:latin typeface="Microsoft YaHei"/>
+                <a:ea typeface="Microsoft YaHei"/>
+                <a:cs typeface="Microsoft YaHei"/>
+              </a:rPr>
+              <a:t>挡掉 1 个模式</a:t>
+            </a:r>
+          </a:p>
+        </p:txBody>
+      </p:sp>
+      <p:sp>
+        <p:nvSpPr>
+          <p:cNvPr id="43" name="TextBox 42"/>
+          <p:cNvSpPr txBox="1"/>
+          <p:nvPr/>
+        </p:nvSpPr>
+        <p:spPr>
+          <a:xfrm>
+            <a:off x="7674559" y="2688336"/>
+            <a:ext cx="3767328" cy="365760"/>
+          </a:xfrm>
+          <a:prstGeom prst="rect">
+            <a:avLst/>
+          </a:prstGeom>
+          <a:noFill/>
+        </p:spPr>
+        <p:txBody>
+          <a:bodyPr wrap="square" anchor="ctr" lIns="0" tIns="0" rIns="0" bIns="0">
+            <a:noAutofit/>
+          </a:bodyPr>
+          <a:lstStyle/>
+          <a:p>
+            <a:pPr algn="l" latinLnBrk="0">
+              <a:lnSpc>
+                <a:spcPct val="100000"/>
+              </a:lnSpc>
+              <a:spcBef>
+                <a:spcPts val="0"/>
+              </a:spcBef>
+              <a:spcAft>
+                <a:spcPts val="0"/>
+              </a:spcAft>
+            </a:pPr>
+            <a:r>
+              <a:rPr sz="1000" b="0">
+                <a:solidFill>
+                  <a:srgbClr val="1B4D69"/>
+                </a:solidFill>
+                <a:latin typeface="Microsoft YaHei"/>
+                <a:ea typeface="Microsoft YaHei"/>
+                <a:cs typeface="Microsoft YaHei"/>
+              </a:rPr>
+              <a:t>分组关掉后 cos 0.000，算出来直接是错的</a:t>
+            </a:r>
+          </a:p>
+        </p:txBody>
+      </p:sp>
+      <p:sp>
+        <p:nvSpPr>
+          <p:cNvPr id="44" name="Oval 43"/>
+          <p:cNvSpPr/>
+          <p:nvPr/>
+        </p:nvSpPr>
+        <p:spPr>
+          <a:xfrm>
+            <a:off x="7308799" y="3118103"/>
+            <a:ext cx="274320" cy="274320"/>
+          </a:xfrm>
+          <a:prstGeom prst="ellipse">
+            <a:avLst/>
+          </a:prstGeom>
+          <a:solidFill>
+            <a:srgbClr val="0F62CE"/>
+          </a:solidFill>
+          <a:ln>
+            <a:noFill/>
+          </a:ln>
+        </p:spPr>
+        <p:txBody>
+          <a:bodyPr rtlCol="0" anchor="ctr" wrap="square" lIns="0" tIns="0" rIns="0" bIns="0">
+            <a:noAutofit/>
+          </a:bodyPr>
+          <a:lstStyle/>
+          <a:p>
+            <a:pPr algn="ctr" latinLnBrk="0">
+              <a:lnSpc>
+                <a:spcPct val="100000"/>
+              </a:lnSpc>
+              <a:spcBef>
+                <a:spcPts val="0"/>
+              </a:spcBef>
+              <a:spcAft>
+                <a:spcPts val="0"/>
+              </a:spcAft>
+            </a:pPr>
+            <a:r>
+              <a:rPr sz="1100" b="1">
+                <a:solidFill>
+                  <a:srgbClr val="FFFFFF"/>
+                </a:solidFill>
+                <a:latin typeface="Arial"/>
+                <a:ea typeface="Microsoft YaHei"/>
+                <a:cs typeface="Microsoft YaHei"/>
+              </a:rPr>
+              <a:t>②</a:t>
+            </a:r>
+          </a:p>
+        </p:txBody>
+      </p:sp>
+      <p:sp>
+        <p:nvSpPr>
+          <p:cNvPr id="45" name="TextBox 44"/>
+          <p:cNvSpPr txBox="1"/>
+          <p:nvPr/>
+        </p:nvSpPr>
+        <p:spPr>
+          <a:xfrm>
+            <a:off x="7674559" y="3090672"/>
+            <a:ext cx="1188720" cy="256032"/>
+          </a:xfrm>
+          <a:prstGeom prst="rect">
+            <a:avLst/>
+          </a:prstGeom>
+          <a:noFill/>
+        </p:spPr>
+        <p:txBody>
+          <a:bodyPr wrap="square" anchor="ctr" lIns="0" tIns="0" rIns="0" bIns="0">
+            <a:noAutofit/>
+          </a:bodyPr>
+          <a:lstStyle/>
+          <a:p>
+            <a:pPr algn="l" latinLnBrk="0">
+              <a:lnSpc>
+                <a:spcPct val="100000"/>
+              </a:lnSpc>
+              <a:spcBef>
+                <a:spcPts val="0"/>
+              </a:spcBef>
+              <a:spcAft>
+                <a:spcPts val="0"/>
+              </a:spcAft>
+            </a:pPr>
+            <a:r>
+              <a:rPr sz="1150" b="1">
+                <a:solidFill>
+                  <a:srgbClr val="0A2B45"/>
+                </a:solidFill>
+                <a:latin typeface="Microsoft YaHei"/>
+                <a:ea typeface="Microsoft YaHei"/>
+                <a:cs typeface="Microsoft YaHei"/>
+              </a:rPr>
+              <a:t>质量达标</a:t>
+            </a:r>
+          </a:p>
+        </p:txBody>
+      </p:sp>
+      <p:sp>
+        <p:nvSpPr>
+          <p:cNvPr id="46" name="TextBox 45"/>
+          <p:cNvSpPr txBox="1"/>
+          <p:nvPr/>
+        </p:nvSpPr>
+        <p:spPr>
+          <a:xfrm>
+            <a:off x="10070287" y="3090672"/>
+            <a:ext cx="1371600" cy="256032"/>
+          </a:xfrm>
+          <a:prstGeom prst="rect">
+            <a:avLst/>
+          </a:prstGeom>
+          <a:noFill/>
+        </p:spPr>
+        <p:txBody>
+          <a:bodyPr wrap="square" anchor="ctr" lIns="0" tIns="0" rIns="0" bIns="0">
+            <a:noAutofit/>
+          </a:bodyPr>
+          <a:lstStyle/>
+          <a:p>
+            <a:pPr algn="r" latinLnBrk="0">
+              <a:lnSpc>
+                <a:spcPct val="100000"/>
+              </a:lnSpc>
+              <a:spcBef>
+                <a:spcPts val="0"/>
+              </a:spcBef>
+              <a:spcAft>
+                <a:spcPts val="0"/>
+              </a:spcAft>
+            </a:pPr>
+            <a:r>
+              <a:rPr sz="1100" b="0">
                 <a:solidFill>
                   <a:srgbClr val="40708B"/>
                 </a:solidFill>
@@ -20939,9 +21426,84 @@
                 <a:ea typeface="Microsoft YaHei"/>
                 <a:cs typeface="Microsoft YaHei"/>
               </a:rPr>
-              <a:t>待补充实际效果</a:t>
-            </a:r>
-          </a:p>
+              <a:t>本轮没拦下</a:t>
+            </a:r>
+          </a:p>
+        </p:txBody>
+      </p:sp>
+      <p:sp>
+        <p:nvSpPr>
+          <p:cNvPr id="47" name="TextBox 46"/>
+          <p:cNvSpPr txBox="1"/>
+          <p:nvPr/>
+        </p:nvSpPr>
+        <p:spPr>
+          <a:xfrm>
+            <a:off x="7674559" y="3346704"/>
+            <a:ext cx="3767328" cy="365760"/>
+          </a:xfrm>
+          <a:prstGeom prst="rect">
+            <a:avLst/>
+          </a:prstGeom>
+          <a:noFill/>
+        </p:spPr>
+        <p:txBody>
+          <a:bodyPr wrap="square" anchor="ctr" lIns="0" tIns="0" rIns="0" bIns="0">
+            <a:noAutofit/>
+          </a:bodyPr>
+          <a:lstStyle/>
+          <a:p>
+            <a:pPr algn="l" latinLnBrk="0">
+              <a:lnSpc>
+                <a:spcPct val="100000"/>
+              </a:lnSpc>
+              <a:spcBef>
+                <a:spcPts val="0"/>
+              </a:spcBef>
+              <a:spcAft>
+                <a:spcPts val="0"/>
+              </a:spcAft>
+            </a:pPr>
+            <a:r>
+              <a:rPr sz="1000" b="0">
+                <a:solidFill>
+                  <a:srgbClr val="40708B"/>
+                </a:solidFill>
+                <a:latin typeface="Microsoft YaHei"/>
+                <a:ea typeface="Microsoft YaHei"/>
+                <a:cs typeface="Microsoft YaHei"/>
+              </a:rPr>
+              <a:t>过了 ① 的候选输出逐位一致，不必再看质量</a:t>
+            </a:r>
+          </a:p>
+        </p:txBody>
+      </p:sp>
+      <p:sp>
+        <p:nvSpPr>
+          <p:cNvPr id="48" name="Oval 47"/>
+          <p:cNvSpPr/>
+          <p:nvPr/>
+        </p:nvSpPr>
+        <p:spPr>
+          <a:xfrm>
+            <a:off x="7308799" y="3776472"/>
+            <a:ext cx="274320" cy="274320"/>
+          </a:xfrm>
+          <a:prstGeom prst="ellipse">
+            <a:avLst/>
+          </a:prstGeom>
+          <a:solidFill>
+            <a:srgbClr val="0F62CE"/>
+          </a:solidFill>
+          <a:ln>
+            <a:noFill/>
+          </a:ln>
+        </p:spPr>
+        <p:txBody>
+          <a:bodyPr rtlCol="0" anchor="ctr" wrap="square" lIns="0" tIns="0" rIns="0" bIns="0">
+            <a:noAutofit/>
+          </a:bodyPr>
+          <a:lstStyle/>
           <a:p>
             <a:pPr algn="ctr" latinLnBrk="0">
               <a:lnSpc>
@@ -20955,77 +21517,194 @@
               </a:spcAft>
             </a:pPr>
             <a:r>
-              <a:rPr sz="1050" b="0">
-                <a:solidFill>
-                  <a:srgbClr val="7FA4BA"/>
-                </a:solidFill>
-                <a:latin typeface="Microsoft YaHei"/>
-                <a:ea typeface="Microsoft YaHei"/>
-                <a:cs typeface="Microsoft YaHei"/>
-              </a:rPr>
-              <a:t>建议：优化收益曲线</a:t>
-            </a:r>
-          </a:p>
-          <a:p>
-            <a:pPr algn="ctr" latinLnBrk="0">
-              <a:lnSpc>
-                <a:spcPct val="100000"/>
-              </a:lnSpc>
-              <a:spcBef>
-                <a:spcPts val="0"/>
-              </a:spcBef>
-              <a:spcAft>
-                <a:spcPts val="0"/>
-              </a:spcAft>
-            </a:pPr>
-            <a:r>
-              <a:rPr sz="1050" b="0">
-                <a:solidFill>
-                  <a:srgbClr val="7FA4BA"/>
-                </a:solidFill>
-                <a:latin typeface="Microsoft YaHei"/>
-                <a:ea typeface="Microsoft YaHei"/>
-                <a:cs typeface="Microsoft YaHei"/>
-              </a:rPr>
-              <a:t>横轴为候选轮次，纵轴为收益；复验通过者单独标注</a:t>
-            </a:r>
-          </a:p>
-          <a:p>
-            <a:pPr algn="ctr" latinLnBrk="0">
-              <a:lnSpc>
-                <a:spcPct val="100000"/>
-              </a:lnSpc>
-              <a:spcBef>
-                <a:spcPts val="0"/>
-              </a:spcBef>
-              <a:spcAft>
-                <a:spcPts val="0"/>
-              </a:spcAft>
-            </a:pPr>
-            <a:r>
-              <a:rPr sz="950" b="0">
-                <a:solidFill>
-                  <a:srgbClr val="7FA4BA"/>
-                </a:solidFill>
-                <a:latin typeface="Consolas"/>
-                <a:ea typeface="Microsoft YaHei"/>
-                <a:cs typeface="Microsoft YaHei"/>
-              </a:rPr>
-              <a:t>5.0 × 4.18 in</a:t>
-            </a:r>
-          </a:p>
-        </p:txBody>
-      </p:sp>
-      <p:sp>
-        <p:nvSpPr>
-          <p:cNvPr id="36" name="Rectangle 35"/>
+              <a:rPr sz="1100" b="1">
+                <a:solidFill>
+                  <a:srgbClr val="FFFFFF"/>
+                </a:solidFill>
+                <a:latin typeface="Arial"/>
+                <a:ea typeface="Microsoft YaHei"/>
+                <a:cs typeface="Microsoft YaHei"/>
+              </a:rPr>
+              <a:t>③</a:t>
+            </a:r>
+          </a:p>
+        </p:txBody>
+      </p:sp>
+      <p:sp>
+        <p:nvSpPr>
+          <p:cNvPr id="49" name="TextBox 48"/>
+          <p:cNvSpPr txBox="1"/>
+          <p:nvPr/>
+        </p:nvSpPr>
+        <p:spPr>
+          <a:xfrm>
+            <a:off x="7674559" y="3749039"/>
+            <a:ext cx="1188720" cy="256032"/>
+          </a:xfrm>
+          <a:prstGeom prst="rect">
+            <a:avLst/>
+          </a:prstGeom>
+          <a:noFill/>
+        </p:spPr>
+        <p:txBody>
+          <a:bodyPr wrap="square" anchor="ctr" lIns="0" tIns="0" rIns="0" bIns="0">
+            <a:noAutofit/>
+          </a:bodyPr>
+          <a:lstStyle/>
+          <a:p>
+            <a:pPr algn="l" latinLnBrk="0">
+              <a:lnSpc>
+                <a:spcPct val="100000"/>
+              </a:lnSpc>
+              <a:spcBef>
+                <a:spcPts val="0"/>
+              </a:spcBef>
+              <a:spcAft>
+                <a:spcPts val="0"/>
+              </a:spcAft>
+            </a:pPr>
+            <a:r>
+              <a:rPr sz="1150" b="1">
+                <a:solidFill>
+                  <a:srgbClr val="0A2B45"/>
+                </a:solidFill>
+                <a:latin typeface="Microsoft YaHei"/>
+                <a:ea typeface="Microsoft YaHei"/>
+                <a:cs typeface="Microsoft YaHei"/>
+              </a:rPr>
+              <a:t>确实更快</a:t>
+            </a:r>
+          </a:p>
+        </p:txBody>
+      </p:sp>
+      <p:sp>
+        <p:nvSpPr>
+          <p:cNvPr id="50" name="TextBox 49"/>
+          <p:cNvSpPr txBox="1"/>
+          <p:nvPr/>
+        </p:nvSpPr>
+        <p:spPr>
+          <a:xfrm>
+            <a:off x="10070287" y="3749039"/>
+            <a:ext cx="1371600" cy="256032"/>
+          </a:xfrm>
+          <a:prstGeom prst="rect">
+            <a:avLst/>
+          </a:prstGeom>
+          <a:noFill/>
+        </p:spPr>
+        <p:txBody>
+          <a:bodyPr wrap="square" anchor="ctr" lIns="0" tIns="0" rIns="0" bIns="0">
+            <a:noAutofit/>
+          </a:bodyPr>
+          <a:lstStyle/>
+          <a:p>
+            <a:pPr algn="r" latinLnBrk="0">
+              <a:lnSpc>
+                <a:spcPct val="100000"/>
+              </a:lnSpc>
+              <a:spcBef>
+                <a:spcPts val="0"/>
+              </a:spcBef>
+              <a:spcAft>
+                <a:spcPts val="0"/>
+              </a:spcAft>
+            </a:pPr>
+            <a:r>
+              <a:rPr sz="1100" b="1">
+                <a:solidFill>
+                  <a:srgbClr val="D94A3D"/>
+                </a:solidFill>
+                <a:latin typeface="Microsoft YaHei"/>
+                <a:ea typeface="Microsoft YaHei"/>
+                <a:cs typeface="Microsoft YaHei"/>
+              </a:rPr>
+              <a:t>挡掉 3 组</a:t>
+            </a:r>
+          </a:p>
+        </p:txBody>
+      </p:sp>
+      <p:sp>
+        <p:nvSpPr>
+          <p:cNvPr id="51" name="TextBox 50"/>
+          <p:cNvSpPr txBox="1"/>
+          <p:nvPr/>
+        </p:nvSpPr>
+        <p:spPr>
+          <a:xfrm>
+            <a:off x="7674559" y="4005072"/>
+            <a:ext cx="3767328" cy="365760"/>
+          </a:xfrm>
+          <a:prstGeom prst="rect">
+            <a:avLst/>
+          </a:prstGeom>
+          <a:noFill/>
+        </p:spPr>
+        <p:txBody>
+          <a:bodyPr wrap="square" anchor="ctr" lIns="0" tIns="0" rIns="0" bIns="0">
+            <a:noAutofit/>
+          </a:bodyPr>
+          <a:lstStyle/>
+          <a:p>
+            <a:pPr algn="l" latinLnBrk="0">
+              <a:lnSpc>
+                <a:spcPct val="100000"/>
+              </a:lnSpc>
+              <a:spcBef>
+                <a:spcPts val="0"/>
+              </a:spcBef>
+              <a:spcAft>
+                <a:spcPts val="0"/>
+              </a:spcAft>
+            </a:pPr>
+            <a:r>
+              <a:rPr sz="1000" b="0">
+                <a:solidFill>
+                  <a:srgbClr val="1B4D69"/>
+                </a:solidFill>
+                <a:latin typeface="Microsoft YaHei"/>
+                <a:ea typeface="Microsoft YaHei"/>
+                <a:cs typeface="Microsoft YaHei"/>
+              </a:rPr>
+              <a:t>强制不分组 −20%；换现成核 0.61× 更慢；</a:t>
+            </a:r>
+          </a:p>
+          <a:p>
+            <a:pPr algn="l" latinLnBrk="0">
+              <a:lnSpc>
+                <a:spcPct val="100000"/>
+              </a:lnSpc>
+              <a:spcBef>
+                <a:spcPts val="0"/>
+              </a:spcBef>
+              <a:spcAft>
+                <a:spcPts val="0"/>
+              </a:spcAft>
+            </a:pPr>
+            <a:r>
+              <a:rPr sz="1000" b="0">
+                <a:solidFill>
+                  <a:srgbClr val="1B4D69"/>
+                </a:solidFill>
+                <a:latin typeface="Microsoft YaHei"/>
+                <a:ea typeface="Microsoft YaHei"/>
+                <a:cs typeface="Microsoft YaHei"/>
+              </a:rPr>
+              <a:t>路由融合最多只值 0.9%，够不着 3% 的门槛</a:t>
+            </a:r>
+          </a:p>
+        </p:txBody>
+      </p:sp>
+      <p:sp>
+        <p:nvSpPr>
+          <p:cNvPr id="52" name="Rectangle 51"/>
           <p:cNvSpPr/>
           <p:nvPr/>
         </p:nvSpPr>
         <p:spPr>
           <a:xfrm>
-            <a:off x="548640" y="5632704"/>
-            <a:ext cx="11094415" cy="475488"/>
+            <a:off x="7272223" y="4425696"/>
+            <a:ext cx="4169663" cy="713232"/>
           </a:xfrm>
           <a:prstGeom prst="rect">
             <a:avLst/>
@@ -21047,7 +21726,257 @@
       </p:sp>
       <p:sp>
         <p:nvSpPr>
-          <p:cNvPr id="37" name="Rectangle 36"/>
+          <p:cNvPr id="53" name="TextBox 52"/>
+          <p:cNvSpPr txBox="1"/>
+          <p:nvPr/>
+        </p:nvSpPr>
+        <p:spPr>
+          <a:xfrm>
+            <a:off x="7436815" y="4462272"/>
+            <a:ext cx="3840480" cy="237744"/>
+          </a:xfrm>
+          <a:prstGeom prst="rect">
+            <a:avLst/>
+          </a:prstGeom>
+          <a:noFill/>
+        </p:spPr>
+        <p:txBody>
+          <a:bodyPr wrap="square" anchor="ctr" lIns="0" tIns="0" rIns="0" bIns="0">
+            <a:noAutofit/>
+          </a:bodyPr>
+          <a:lstStyle/>
+          <a:p>
+            <a:pPr algn="l" latinLnBrk="0">
+              <a:lnSpc>
+                <a:spcPct val="100000"/>
+              </a:lnSpc>
+              <a:spcBef>
+                <a:spcPts val="0"/>
+              </a:spcBef>
+              <a:spcAft>
+                <a:spcPts val="0"/>
+              </a:spcAft>
+            </a:pPr>
+            <a:r>
+              <a:rPr sz="1100" b="1">
+                <a:solidFill>
+                  <a:srgbClr val="0A2B45"/>
+                </a:solidFill>
+                <a:latin typeface="Microsoft YaHei"/>
+                <a:ea typeface="Microsoft YaHei"/>
+                <a:cs typeface="Microsoft YaHei"/>
+              </a:rPr>
+              <a:t>三道全过</a:t>
+            </a:r>
+            <a:r>
+              <a:rPr sz="1100" b="1">
+                <a:solidFill>
+                  <a:srgbClr val="0F62CE"/>
+                </a:solidFill>
+                <a:latin typeface="Microsoft YaHei"/>
+                <a:ea typeface="Microsoft YaHei"/>
+                <a:cs typeface="Microsoft YaHei"/>
+              </a:rPr>
+              <a:t>　2 组 · 交付</a:t>
+            </a:r>
+          </a:p>
+        </p:txBody>
+      </p:sp>
+      <p:sp>
+        <p:nvSpPr>
+          <p:cNvPr id="54" name="TextBox 53"/>
+          <p:cNvSpPr txBox="1"/>
+          <p:nvPr/>
+        </p:nvSpPr>
+        <p:spPr>
+          <a:xfrm>
+            <a:off x="7436815" y="4700016"/>
+            <a:ext cx="3840480" cy="201168"/>
+          </a:xfrm>
+          <a:prstGeom prst="rect">
+            <a:avLst/>
+          </a:prstGeom>
+          <a:noFill/>
+        </p:spPr>
+        <p:txBody>
+          <a:bodyPr wrap="square" anchor="ctr" lIns="0" tIns="0" rIns="0" bIns="0">
+            <a:noAutofit/>
+          </a:bodyPr>
+          <a:lstStyle/>
+          <a:p>
+            <a:pPr algn="l" latinLnBrk="0">
+              <a:lnSpc>
+                <a:spcPct val="100000"/>
+              </a:lnSpc>
+              <a:spcBef>
+                <a:spcPts val="0"/>
+              </a:spcBef>
+              <a:spcAft>
+                <a:spcPts val="0"/>
+              </a:spcAft>
+            </a:pPr>
+            <a:r>
+              <a:rPr sz="1000" b="0">
+                <a:solidFill>
+                  <a:srgbClr val="1B4D69"/>
+                </a:solidFill>
+                <a:latin typeface="Microsoft YaHei"/>
+                <a:ea typeface="Microsoft YaHei"/>
+                <a:cs typeface="Microsoft YaHei"/>
+              </a:rPr>
+              <a:t>· 激活与量化合成一个核</a:t>
+            </a:r>
+          </a:p>
+        </p:txBody>
+      </p:sp>
+      <p:sp>
+        <p:nvSpPr>
+          <p:cNvPr id="55" name="TextBox 54"/>
+          <p:cNvSpPr txBox="1"/>
+          <p:nvPr/>
+        </p:nvSpPr>
+        <p:spPr>
+          <a:xfrm>
+            <a:off x="7436815" y="4901183"/>
+            <a:ext cx="3840480" cy="201168"/>
+          </a:xfrm>
+          <a:prstGeom prst="rect">
+            <a:avLst/>
+          </a:prstGeom>
+          <a:noFill/>
+        </p:spPr>
+        <p:txBody>
+          <a:bodyPr wrap="square" anchor="ctr" lIns="0" tIns="0" rIns="0" bIns="0">
+            <a:noAutofit/>
+          </a:bodyPr>
+          <a:lstStyle/>
+          <a:p>
+            <a:pPr algn="l" latinLnBrk="0">
+              <a:lnSpc>
+                <a:spcPct val="100000"/>
+              </a:lnSpc>
+              <a:spcBef>
+                <a:spcPts val="0"/>
+              </a:spcBef>
+              <a:spcAft>
+                <a:spcPts val="0"/>
+              </a:spcAft>
+            </a:pPr>
+            <a:r>
+              <a:rPr sz="1000" b="0">
+                <a:solidFill>
+                  <a:srgbClr val="1B4D69"/>
+                </a:solidFill>
+                <a:latin typeface="Microsoft YaHei"/>
+                <a:ea typeface="Microsoft YaHei"/>
+                <a:cs typeface="Microsoft YaHei"/>
+              </a:rPr>
+              <a:t>· 换成耗时不随规模涨的核</a:t>
+            </a:r>
+          </a:p>
+        </p:txBody>
+      </p:sp>
+      <p:sp>
+        <p:nvSpPr>
+          <p:cNvPr id="56" name="TextBox 55"/>
+          <p:cNvSpPr txBox="1"/>
+          <p:nvPr/>
+        </p:nvSpPr>
+        <p:spPr>
+          <a:xfrm>
+            <a:off x="7272223" y="5212079"/>
+            <a:ext cx="4169663" cy="237744"/>
+          </a:xfrm>
+          <a:prstGeom prst="rect">
+            <a:avLst/>
+          </a:prstGeom>
+          <a:noFill/>
+        </p:spPr>
+        <p:txBody>
+          <a:bodyPr wrap="square" anchor="ctr" lIns="0" tIns="0" rIns="0" bIns="0">
+            <a:noAutofit/>
+          </a:bodyPr>
+          <a:lstStyle/>
+          <a:p>
+            <a:pPr algn="l" latinLnBrk="0">
+              <a:lnSpc>
+                <a:spcPct val="100000"/>
+              </a:lnSpc>
+              <a:spcBef>
+                <a:spcPts val="0"/>
+              </a:spcBef>
+              <a:spcAft>
+                <a:spcPts val="0"/>
+              </a:spcAft>
+            </a:pPr>
+            <a:r>
+              <a:rPr sz="1000" b="0">
+                <a:solidFill>
+                  <a:srgbClr val="40708B"/>
+                </a:solidFill>
+                <a:latin typeface="Microsoft YaHei"/>
+                <a:ea typeface="Microsoft YaHei"/>
+                <a:cs typeface="Microsoft YaHei"/>
+              </a:rPr>
+              <a:t>峰值吞吐 </a:t>
+            </a:r>
+            <a:r>
+              <a:rPr sz="1000" b="1">
+                <a:solidFill>
+                  <a:srgbClr val="0A2B45"/>
+                </a:solidFill>
+                <a:latin typeface="Consolas"/>
+                <a:ea typeface="Microsoft YaHei"/>
+                <a:cs typeface="Microsoft YaHei"/>
+              </a:rPr>
+              <a:t>1370 → 1883 tok/s</a:t>
+            </a:r>
+            <a:r>
+              <a:rPr sz="1100" b="1">
+                <a:solidFill>
+                  <a:srgbClr val="0F62CE"/>
+                </a:solidFill>
+                <a:latin typeface="Consolas"/>
+                <a:ea typeface="Microsoft YaHei"/>
+                <a:cs typeface="Microsoft YaHei"/>
+              </a:rPr>
+              <a:t>　+37%</a:t>
+            </a:r>
+          </a:p>
+        </p:txBody>
+      </p:sp>
+      <p:sp>
+        <p:nvSpPr>
+          <p:cNvPr id="57" name="Rectangle 56"/>
+          <p:cNvSpPr/>
+          <p:nvPr/>
+        </p:nvSpPr>
+        <p:spPr>
+          <a:xfrm>
+            <a:off x="548640" y="5632704"/>
+            <a:ext cx="11094415" cy="475488"/>
+          </a:xfrm>
+          <a:prstGeom prst="rect">
+            <a:avLst/>
+          </a:prstGeom>
+          <a:solidFill>
+            <a:srgbClr val="C9E1FC"/>
+          </a:solidFill>
+          <a:ln>
+            <a:noFill/>
+          </a:ln>
+        </p:spPr>
+        <p:txBody>
+          <a:bodyPr rtlCol="0" anchor="ctr"/>
+          <a:lstStyle/>
+          <a:p>
+            <a:pPr algn="ctr"/>
+          </a:p>
+        </p:txBody>
+      </p:sp>
+      <p:sp>
+        <p:nvSpPr>
+          <p:cNvPr id="58" name="Rectangle 57"/>
           <p:cNvSpPr/>
           <p:nvPr/>
         </p:nvSpPr>
@@ -21076,7 +22005,7 @@
       </p:sp>
       <p:sp>
         <p:nvSpPr>
-          <p:cNvPr id="38" name="TextBox 37"/>
+          <p:cNvPr id="59" name="TextBox 58"/>
           <p:cNvSpPr txBox="1"/>
           <p:nvPr/>
         </p:nvSpPr>
@@ -21134,7 +22063,7 @@
       </p:sp>
       <p:sp>
         <p:nvSpPr>
-          <p:cNvPr id="39" name="TextBox 38"/>
+          <p:cNvPr id="60" name="TextBox 59"/>
           <p:cNvSpPr txBox="1"/>
           <p:nvPr/>
         </p:nvSpPr>
@@ -21181,7 +22110,7 @@
       </p:sp>
       <p:sp>
         <p:nvSpPr>
-          <p:cNvPr id="40" name="TextBox 39"/>
+          <p:cNvPr id="61" name="TextBox 60"/>
           <p:cNvSpPr txBox="1"/>
           <p:nvPr/>
         </p:nvSpPr>
